--- a/yocto_training_all_session_decks/session_decks/D4S4_App_Deploy_Debug.pptx
+++ b/yocto_training_all_session_decks/session_decks/D4S4_App_Deploy_Debug.pptx
@@ -5,27 +5,27 @@
     <p:sldMasterId id="2147483648" r:id="rId1"/>
   </p:sldMasterIdLst>
   <p:notesMasterIdLst>
-    <p:notesMasterId r:id="rId8"/>
+    <p:notesMasterId r:id="rId12"/>
   </p:notesMasterIdLst>
   <p:handoutMasterIdLst>
-    <p:handoutMasterId r:id="rId9"/>
+    <p:handoutMasterId r:id="rId13"/>
   </p:handoutMasterIdLst>
   <p:sldIdLst>
-    <p:sldId id="1007" r:id="rId18"/>
-    <p:sldId id="1008" r:id="rId19"/>
-    <p:sldId id="1009" r:id="rId20"/>
-    <p:sldId id="1010" r:id="rId21"/>
-    <p:sldId id="1011" r:id="rId22"/>
-    <p:sldId id="1012" r:id="rId23"/>
-    <p:sldId id="1013" r:id="rId24"/>
-    <p:sldId id="1014" r:id="rId25"/>
-    <p:sldId id="1015" r:id="rId26"/>
-    <p:sldId id="1016" r:id="rId27"/>
+    <p:sldId id="1007" r:id="rId2"/>
+    <p:sldId id="1008" r:id="rId3"/>
+    <p:sldId id="1009" r:id="rId4"/>
+    <p:sldId id="1010" r:id="rId5"/>
+    <p:sldId id="1011" r:id="rId6"/>
+    <p:sldId id="1012" r:id="rId7"/>
+    <p:sldId id="1013" r:id="rId8"/>
+    <p:sldId id="1014" r:id="rId9"/>
+    <p:sldId id="1015" r:id="rId10"/>
+    <p:sldId id="1016" r:id="rId11"/>
   </p:sldIdLst>
   <p:sldSz cx="12192000" cy="6858000"/>
   <p:notesSz cx="6858000" cy="9144000"/>
   <p:custDataLst>
-    <p:tags r:id="rId10"/>
+    <p:tags r:id="rId14"/>
   </p:custDataLst>
   <p:defaultTextStyle>
     <a:defPPr>
@@ -2931,7 +2931,7 @@
           <a:p>
             <a:fld id="{0CEC647C-F50C-4F78-AA33-D7AA6CDA18EE}" type="datetimeFigureOut">
               <a:rPr lang="en-US" smtClean="0"/>
-              <a:t>7/13/2025</a:t>
+              <a:t>6/12/2026</a:t>
             </a:fld>
             <a:endParaRPr lang="en-US"/>
           </a:p>
@@ -3096,7 +3096,7 @@
           <a:p>
             <a:fld id="{3A83341F-E62C-483B-84B4-966F8BE46097}" type="datetimeFigureOut">
               <a:rPr lang="en-US" smtClean="0"/>
-              <a:t>7/13/2025</a:t>
+              <a:t>6/12/2026</a:t>
             </a:fld>
             <a:endParaRPr lang="en-US"/>
           </a:p>
@@ -5180,8 +5180,8 @@
 </p:sldMaster>
 </file>
 
-<file path=ppt/slides/slide10.xml><?xml version="1.0" encoding="utf-8"?>
-<p:sld xmlns:a="http://schemas.openxmlformats.org/drawingml/2006/main" xmlns:p="http://schemas.openxmlformats.org/presentationml/2006/main" xmlns:r="http://schemas.openxmlformats.org/officeDocument/2006/relationships">
+<file path=ppt/slides/slide1.xml><?xml version="1.0" encoding="utf-8"?>
+<p:sld xmlns:a="http://schemas.openxmlformats.org/drawingml/2006/main" xmlns:r="http://schemas.openxmlformats.org/officeDocument/2006/relationships" xmlns:p="http://schemas.openxmlformats.org/presentationml/2006/main">
   <p:cSld>
     <p:spTree>
       <p:nvGrpSpPr>
@@ -5189,7 +5189,93 @@
         <p:cNvGrpSpPr/>
         <p:nvPr/>
       </p:nvGrpSpPr>
-      <p:grpSpPr/>
+      <p:grpSpPr>
+        <a:xfrm>
+          <a:off x="0" y="0"/>
+          <a:ext cx="0" cy="0"/>
+          <a:chOff x="0" y="0"/>
+          <a:chExt cx="0" cy="0"/>
+        </a:xfrm>
+      </p:grpSpPr>
+      <p:sp>
+        <p:nvSpPr>
+          <p:cNvPr id="2" name="Title 1"/>
+          <p:cNvSpPr>
+            <a:spLocks noGrp="1"/>
+          </p:cNvSpPr>
+          <p:nvPr>
+            <p:ph type="ctrTitle"/>
+          </p:nvPr>
+        </p:nvSpPr>
+        <p:spPr/>
+        <p:txBody>
+          <a:bodyPr/>
+          <a:lstStyle/>
+          <a:p>
+            <a:r>
+              <a:rPr sz="4400" b="1">
+                <a:solidFill>
+                  <a:srgbClr val="FFFFFF"/>
+                </a:solidFill>
+                <a:latin typeface="Calibri"/>
+              </a:rPr>
+              <a:t>Deploy &amp; Debug Applications</a:t>
+            </a:r>
+          </a:p>
+        </p:txBody>
+      </p:sp>
+      <p:sp>
+        <p:nvSpPr>
+          <p:cNvPr id="3" name="Subtitle 2"/>
+          <p:cNvSpPr>
+            <a:spLocks noGrp="1"/>
+          </p:cNvSpPr>
+          <p:nvPr>
+            <p:ph type="subTitle" idx="1"/>
+          </p:nvPr>
+        </p:nvSpPr>
+        <p:spPr/>
+        <p:txBody>
+          <a:bodyPr/>
+          <a:lstStyle/>
+          <a:p>
+            <a:r>
+              <a:rPr sz="1800" dirty="0">
+                <a:solidFill>
+                  <a:srgbClr val="FFFFFF"/>
+                </a:solidFill>
+                <a:latin typeface="Calibri"/>
+              </a:rPr>
+              <a:t>From SDK build to debugging on the target</a:t>
+            </a:r>
+          </a:p>
+        </p:txBody>
+      </p:sp>
+    </p:spTree>
+  </p:cSld>
+  <p:clrMapOvr>
+    <a:masterClrMapping/>
+  </p:clrMapOvr>
+</p:sld>
+</file>
+
+<file path=ppt/slides/slide10.xml><?xml version="1.0" encoding="utf-8"?>
+<p:sld xmlns:a="http://schemas.openxmlformats.org/drawingml/2006/main" xmlns:r="http://schemas.openxmlformats.org/officeDocument/2006/relationships" xmlns:p="http://schemas.openxmlformats.org/presentationml/2006/main">
+  <p:cSld>
+    <p:spTree>
+      <p:nvGrpSpPr>
+        <p:cNvPr id="1" name=""/>
+        <p:cNvGrpSpPr/>
+        <p:nvPr/>
+      </p:nvGrpSpPr>
+      <p:grpSpPr>
+        <a:xfrm>
+          <a:off x="0" y="0"/>
+          <a:ext cx="0" cy="0"/>
+          <a:chOff x="0" y="0"/>
+          <a:chExt cx="0" cy="0"/>
+        </a:xfrm>
+      </p:grpSpPr>
       <p:sp>
         <p:nvSpPr>
           <p:cNvPr id="2" name="Title 1"/>
@@ -5206,13 +5292,10 @@
           <a:lstStyle/>
           <a:p>
             <a:r>
-              <a:rPr sz="3200" b="1">
-                <a:solidFill>
-                  <a:srgbClr val="CC0066"/>
-                </a:solidFill>
+              <a:rPr sz="3200" b="1" dirty="0">
                 <a:latin typeface="Calibri"/>
               </a:rPr>
-              <a:t>Deploy to Target</a:t>
+              <a:t>Session Summary</a:t>
             </a:r>
           </a:p>
         </p:txBody>
@@ -5234,7 +5317,1534 @@
           <a:noFill/>
         </p:spPr>
         <p:txBody>
-          <a:bodyPr wrap="square" anchor="t" lIns="45720" rIns="45720">
+          <a:bodyPr wrap="square" lIns="45720" rIns="45720" anchor="t">
+            <a:spAutoFit/>
+          </a:bodyPr>
+          <a:lstStyle/>
+          <a:p>
+            <a:pPr algn="l"/>
+            <a:r>
+              <a:rPr sz="1500" b="0" i="1">
+                <a:solidFill>
+                  <a:srgbClr val="666666"/>
+                </a:solidFill>
+                <a:latin typeface="Calibri"/>
+              </a:rPr>
+              <a:t>5 things to remember from this session.</a:t>
+            </a:r>
+          </a:p>
+        </p:txBody>
+      </p:sp>
+      <p:sp>
+        <p:nvSpPr>
+          <p:cNvPr id="4" name="Rounded Rectangle 3"/>
+          <p:cNvSpPr/>
+          <p:nvPr/>
+        </p:nvSpPr>
+        <p:spPr>
+          <a:xfrm>
+            <a:off x="822960" y="1874519"/>
+            <a:ext cx="457200" cy="548640"/>
+          </a:xfrm>
+          <a:prstGeom prst="roundRect">
+            <a:avLst/>
+          </a:prstGeom>
+          <a:solidFill>
+            <a:srgbClr val="CC0066"/>
+          </a:solidFill>
+          <a:ln>
+            <a:noFill/>
+          </a:ln>
+          <a:effectLst/>
+        </p:spPr>
+        <p:style>
+          <a:lnRef idx="1">
+            <a:schemeClr val="accent1"/>
+          </a:lnRef>
+          <a:fillRef idx="3">
+            <a:schemeClr val="accent1"/>
+          </a:fillRef>
+          <a:effectRef idx="2">
+            <a:schemeClr val="accent1"/>
+          </a:effectRef>
+          <a:fontRef idx="minor">
+            <a:schemeClr val="lt1"/>
+          </a:fontRef>
+        </p:style>
+        <p:txBody>
+          <a:bodyPr lIns="0" rIns="0" rtlCol="0" anchor="ctr"/>
+          <a:lstStyle/>
+          <a:p>
+            <a:pPr algn="ctr"/>
+            <a:r>
+              <a:rPr sz="2200" b="1">
+                <a:solidFill>
+                  <a:srgbClr val="FFFFFF"/>
+                </a:solidFill>
+                <a:latin typeface="Calibri"/>
+              </a:rPr>
+              <a:t>1</a:t>
+            </a:r>
+          </a:p>
+        </p:txBody>
+      </p:sp>
+      <p:sp>
+        <p:nvSpPr>
+          <p:cNvPr id="5" name="TextBox 4"/>
+          <p:cNvSpPr txBox="1"/>
+          <p:nvPr/>
+        </p:nvSpPr>
+        <p:spPr>
+          <a:xfrm>
+            <a:off x="1417320" y="1874519"/>
+            <a:ext cx="10058400" cy="320040"/>
+          </a:xfrm>
+          <a:prstGeom prst="rect">
+            <a:avLst/>
+          </a:prstGeom>
+          <a:noFill/>
+        </p:spPr>
+        <p:txBody>
+          <a:bodyPr wrap="square" lIns="45720" rIns="45720" anchor="t">
+            <a:spAutoFit/>
+          </a:bodyPr>
+          <a:lstStyle/>
+          <a:p>
+            <a:pPr algn="l"/>
+            <a:r>
+              <a:rPr sz="1600" b="1" i="0">
+                <a:solidFill>
+                  <a:srgbClr val="663399"/>
+                </a:solidFill>
+                <a:latin typeface="Calibri"/>
+              </a:rPr>
+              <a:t>SDK-built binary needs target sysroot</a:t>
+            </a:r>
+          </a:p>
+        </p:txBody>
+      </p:sp>
+      <p:sp>
+        <p:nvSpPr>
+          <p:cNvPr id="6" name="TextBox 5"/>
+          <p:cNvSpPr txBox="1"/>
+          <p:nvPr/>
+        </p:nvSpPr>
+        <p:spPr>
+          <a:xfrm>
+            <a:off x="1417320" y="2185415"/>
+            <a:ext cx="10058400" cy="320040"/>
+          </a:xfrm>
+          <a:prstGeom prst="rect">
+            <a:avLst/>
+          </a:prstGeom>
+          <a:noFill/>
+        </p:spPr>
+        <p:txBody>
+          <a:bodyPr wrap="square" lIns="45720" rIns="45720" anchor="t">
+            <a:spAutoFit/>
+          </a:bodyPr>
+          <a:lstStyle/>
+          <a:p>
+            <a:pPr algn="l"/>
+            <a:r>
+              <a:rPr sz="1300" b="0" i="0">
+                <a:solidFill>
+                  <a:srgbClr val="333333"/>
+                </a:solidFill>
+                <a:latin typeface="Calibri"/>
+              </a:rPr>
+              <a:t>Always cross-compile in the SDK env — never link against host libs</a:t>
+            </a:r>
+          </a:p>
+        </p:txBody>
+      </p:sp>
+      <p:sp>
+        <p:nvSpPr>
+          <p:cNvPr id="7" name="Rounded Rectangle 6"/>
+          <p:cNvSpPr/>
+          <p:nvPr/>
+        </p:nvSpPr>
+        <p:spPr>
+          <a:xfrm>
+            <a:off x="822960" y="2587752"/>
+            <a:ext cx="457200" cy="548640"/>
+          </a:xfrm>
+          <a:prstGeom prst="roundRect">
+            <a:avLst/>
+          </a:prstGeom>
+          <a:solidFill>
+            <a:srgbClr val="CC0066"/>
+          </a:solidFill>
+          <a:ln>
+            <a:noFill/>
+          </a:ln>
+          <a:effectLst/>
+        </p:spPr>
+        <p:style>
+          <a:lnRef idx="1">
+            <a:schemeClr val="accent1"/>
+          </a:lnRef>
+          <a:fillRef idx="3">
+            <a:schemeClr val="accent1"/>
+          </a:fillRef>
+          <a:effectRef idx="2">
+            <a:schemeClr val="accent1"/>
+          </a:effectRef>
+          <a:fontRef idx="minor">
+            <a:schemeClr val="lt1"/>
+          </a:fontRef>
+        </p:style>
+        <p:txBody>
+          <a:bodyPr lIns="0" rIns="0" rtlCol="0" anchor="ctr"/>
+          <a:lstStyle/>
+          <a:p>
+            <a:pPr algn="ctr"/>
+            <a:r>
+              <a:rPr sz="2200" b="1">
+                <a:solidFill>
+                  <a:srgbClr val="FFFFFF"/>
+                </a:solidFill>
+                <a:latin typeface="Calibri"/>
+              </a:rPr>
+              <a:t>2</a:t>
+            </a:r>
+          </a:p>
+        </p:txBody>
+      </p:sp>
+      <p:sp>
+        <p:nvSpPr>
+          <p:cNvPr id="8" name="TextBox 7"/>
+          <p:cNvSpPr txBox="1"/>
+          <p:nvPr/>
+        </p:nvSpPr>
+        <p:spPr>
+          <a:xfrm>
+            <a:off x="1417320" y="2587752"/>
+            <a:ext cx="10058400" cy="320040"/>
+          </a:xfrm>
+          <a:prstGeom prst="rect">
+            <a:avLst/>
+          </a:prstGeom>
+          <a:noFill/>
+        </p:spPr>
+        <p:txBody>
+          <a:bodyPr wrap="square" lIns="45720" rIns="45720" anchor="t">
+            <a:spAutoFit/>
+          </a:bodyPr>
+          <a:lstStyle/>
+          <a:p>
+            <a:pPr algn="l"/>
+            <a:r>
+              <a:rPr sz="1600" b="1" i="0">
+                <a:solidFill>
+                  <a:srgbClr val="663399"/>
+                </a:solidFill>
+                <a:latin typeface="Calibri"/>
+              </a:rPr>
+              <a:t>Production deploy = packages, not scp</a:t>
+            </a:r>
+          </a:p>
+        </p:txBody>
+      </p:sp>
+      <p:sp>
+        <p:nvSpPr>
+          <p:cNvPr id="9" name="TextBox 8"/>
+          <p:cNvSpPr txBox="1"/>
+          <p:nvPr/>
+        </p:nvSpPr>
+        <p:spPr>
+          <a:xfrm>
+            <a:off x="1417320" y="2898648"/>
+            <a:ext cx="10058400" cy="320040"/>
+          </a:xfrm>
+          <a:prstGeom prst="rect">
+            <a:avLst/>
+          </a:prstGeom>
+          <a:noFill/>
+        </p:spPr>
+        <p:txBody>
+          <a:bodyPr wrap="square" lIns="45720" rIns="45720" anchor="t">
+            <a:spAutoFit/>
+          </a:bodyPr>
+          <a:lstStyle/>
+          <a:p>
+            <a:pPr algn="l"/>
+            <a:r>
+              <a:rPr sz="1300" b="0" i="0">
+                <a:solidFill>
+                  <a:srgbClr val="333333"/>
+                </a:solidFill>
+                <a:latin typeface="Calibri"/>
+              </a:rPr>
+              <a:t>Otherwise SBOM/RDEPENDS/upgrade tracking go out the window</a:t>
+            </a:r>
+          </a:p>
+        </p:txBody>
+      </p:sp>
+      <p:sp>
+        <p:nvSpPr>
+          <p:cNvPr id="10" name="Rounded Rectangle 9"/>
+          <p:cNvSpPr/>
+          <p:nvPr/>
+        </p:nvSpPr>
+        <p:spPr>
+          <a:xfrm>
+            <a:off x="822960" y="3300984"/>
+            <a:ext cx="457200" cy="548640"/>
+          </a:xfrm>
+          <a:prstGeom prst="roundRect">
+            <a:avLst/>
+          </a:prstGeom>
+          <a:solidFill>
+            <a:srgbClr val="CC0066"/>
+          </a:solidFill>
+          <a:ln>
+            <a:noFill/>
+          </a:ln>
+          <a:effectLst/>
+        </p:spPr>
+        <p:style>
+          <a:lnRef idx="1">
+            <a:schemeClr val="accent1"/>
+          </a:lnRef>
+          <a:fillRef idx="3">
+            <a:schemeClr val="accent1"/>
+          </a:fillRef>
+          <a:effectRef idx="2">
+            <a:schemeClr val="accent1"/>
+          </a:effectRef>
+          <a:fontRef idx="minor">
+            <a:schemeClr val="lt1"/>
+          </a:fontRef>
+        </p:style>
+        <p:txBody>
+          <a:bodyPr lIns="0" rIns="0" rtlCol="0" anchor="ctr"/>
+          <a:lstStyle/>
+          <a:p>
+            <a:pPr algn="ctr"/>
+            <a:r>
+              <a:rPr sz="2200" b="1">
+                <a:solidFill>
+                  <a:srgbClr val="FFFFFF"/>
+                </a:solidFill>
+                <a:latin typeface="Calibri"/>
+              </a:rPr>
+              <a:t>3</a:t>
+            </a:r>
+          </a:p>
+        </p:txBody>
+      </p:sp>
+      <p:sp>
+        <p:nvSpPr>
+          <p:cNvPr id="11" name="TextBox 10"/>
+          <p:cNvSpPr txBox="1"/>
+          <p:nvPr/>
+        </p:nvSpPr>
+        <p:spPr>
+          <a:xfrm>
+            <a:off x="1417320" y="3300984"/>
+            <a:ext cx="10058400" cy="320040"/>
+          </a:xfrm>
+          <a:prstGeom prst="rect">
+            <a:avLst/>
+          </a:prstGeom>
+          <a:noFill/>
+        </p:spPr>
+        <p:txBody>
+          <a:bodyPr wrap="square" lIns="45720" rIns="45720" anchor="t">
+            <a:spAutoFit/>
+          </a:bodyPr>
+          <a:lstStyle/>
+          <a:p>
+            <a:pPr algn="l"/>
+            <a:r>
+              <a:rPr sz="1600" b="1" i="0">
+                <a:solidFill>
+                  <a:srgbClr val="663399"/>
+                </a:solidFill>
+                <a:latin typeface="Calibri"/>
+              </a:rPr>
+              <a:t>ldd shows what shared libs are needed</a:t>
+            </a:r>
+          </a:p>
+        </p:txBody>
+      </p:sp>
+      <p:sp>
+        <p:nvSpPr>
+          <p:cNvPr id="12" name="TextBox 11"/>
+          <p:cNvSpPr txBox="1"/>
+          <p:nvPr/>
+        </p:nvSpPr>
+        <p:spPr>
+          <a:xfrm>
+            <a:off x="1417320" y="3611879"/>
+            <a:ext cx="10058400" cy="320040"/>
+          </a:xfrm>
+          <a:prstGeom prst="rect">
+            <a:avLst/>
+          </a:prstGeom>
+          <a:noFill/>
+        </p:spPr>
+        <p:txBody>
+          <a:bodyPr wrap="square" lIns="45720" rIns="45720" anchor="t">
+            <a:spAutoFit/>
+          </a:bodyPr>
+          <a:lstStyle/>
+          <a:p>
+            <a:pPr algn="l"/>
+            <a:r>
+              <a:rPr sz="1300" b="0" i="0">
+                <a:solidFill>
+                  <a:srgbClr val="333333"/>
+                </a:solidFill>
+                <a:latin typeface="Calibri"/>
+              </a:rPr>
+              <a:t>'not found' → fix RDEPENDS or install the missing package</a:t>
+            </a:r>
+          </a:p>
+        </p:txBody>
+      </p:sp>
+      <p:sp>
+        <p:nvSpPr>
+          <p:cNvPr id="13" name="Rounded Rectangle 12"/>
+          <p:cNvSpPr/>
+          <p:nvPr/>
+        </p:nvSpPr>
+        <p:spPr>
+          <a:xfrm>
+            <a:off x="822960" y="4014215"/>
+            <a:ext cx="457200" cy="548640"/>
+          </a:xfrm>
+          <a:prstGeom prst="roundRect">
+            <a:avLst/>
+          </a:prstGeom>
+          <a:solidFill>
+            <a:srgbClr val="CC0066"/>
+          </a:solidFill>
+          <a:ln>
+            <a:noFill/>
+          </a:ln>
+          <a:effectLst/>
+        </p:spPr>
+        <p:style>
+          <a:lnRef idx="1">
+            <a:schemeClr val="accent1"/>
+          </a:lnRef>
+          <a:fillRef idx="3">
+            <a:schemeClr val="accent1"/>
+          </a:fillRef>
+          <a:effectRef idx="2">
+            <a:schemeClr val="accent1"/>
+          </a:effectRef>
+          <a:fontRef idx="minor">
+            <a:schemeClr val="lt1"/>
+          </a:fontRef>
+        </p:style>
+        <p:txBody>
+          <a:bodyPr lIns="0" rIns="0" rtlCol="0" anchor="ctr"/>
+          <a:lstStyle/>
+          <a:p>
+            <a:pPr algn="ctr"/>
+            <a:r>
+              <a:rPr sz="2200" b="1">
+                <a:solidFill>
+                  <a:srgbClr val="FFFFFF"/>
+                </a:solidFill>
+                <a:latin typeface="Calibri"/>
+              </a:rPr>
+              <a:t>4</a:t>
+            </a:r>
+          </a:p>
+        </p:txBody>
+      </p:sp>
+      <p:sp>
+        <p:nvSpPr>
+          <p:cNvPr id="14" name="TextBox 13"/>
+          <p:cNvSpPr txBox="1"/>
+          <p:nvPr/>
+        </p:nvSpPr>
+        <p:spPr>
+          <a:xfrm>
+            <a:off x="1417320" y="4014215"/>
+            <a:ext cx="10058400" cy="320040"/>
+          </a:xfrm>
+          <a:prstGeom prst="rect">
+            <a:avLst/>
+          </a:prstGeom>
+          <a:noFill/>
+        </p:spPr>
+        <p:txBody>
+          <a:bodyPr wrap="square" lIns="45720" rIns="45720" anchor="t">
+            <a:spAutoFit/>
+          </a:bodyPr>
+          <a:lstStyle/>
+          <a:p>
+            <a:pPr algn="l"/>
+            <a:r>
+              <a:rPr sz="1600" b="1" i="0">
+                <a:solidFill>
+                  <a:srgbClr val="663399"/>
+                </a:solidFill>
+                <a:latin typeface="Calibri"/>
+              </a:rPr>
+              <a:t>gdbserver gives full remote debug</a:t>
+            </a:r>
+          </a:p>
+        </p:txBody>
+      </p:sp>
+      <p:sp>
+        <p:nvSpPr>
+          <p:cNvPr id="15" name="TextBox 14"/>
+          <p:cNvSpPr txBox="1"/>
+          <p:nvPr/>
+        </p:nvSpPr>
+        <p:spPr>
+          <a:xfrm>
+            <a:off x="1417320" y="4325112"/>
+            <a:ext cx="10058400" cy="320040"/>
+          </a:xfrm>
+          <a:prstGeom prst="rect">
+            <a:avLst/>
+          </a:prstGeom>
+          <a:noFill/>
+        </p:spPr>
+        <p:txBody>
+          <a:bodyPr wrap="square" lIns="45720" rIns="45720" anchor="t">
+            <a:spAutoFit/>
+          </a:bodyPr>
+          <a:lstStyle/>
+          <a:p>
+            <a:pPr algn="l"/>
+            <a:r>
+              <a:rPr sz="1300" b="0" i="0">
+                <a:solidFill>
+                  <a:srgbClr val="333333"/>
+                </a:solidFill>
+                <a:latin typeface="Calibri"/>
+              </a:rPr>
+              <a:t>Pair with target sysroot in gdb; install -dbg packages for symbols</a:t>
+            </a:r>
+          </a:p>
+        </p:txBody>
+      </p:sp>
+      <p:sp>
+        <p:nvSpPr>
+          <p:cNvPr id="16" name="Rounded Rectangle 15"/>
+          <p:cNvSpPr/>
+          <p:nvPr/>
+        </p:nvSpPr>
+        <p:spPr>
+          <a:xfrm>
+            <a:off x="822960" y="4727448"/>
+            <a:ext cx="457200" cy="548640"/>
+          </a:xfrm>
+          <a:prstGeom prst="roundRect">
+            <a:avLst/>
+          </a:prstGeom>
+          <a:solidFill>
+            <a:srgbClr val="CC0066"/>
+          </a:solidFill>
+          <a:ln>
+            <a:noFill/>
+          </a:ln>
+          <a:effectLst/>
+        </p:spPr>
+        <p:style>
+          <a:lnRef idx="1">
+            <a:schemeClr val="accent1"/>
+          </a:lnRef>
+          <a:fillRef idx="3">
+            <a:schemeClr val="accent1"/>
+          </a:fillRef>
+          <a:effectRef idx="2">
+            <a:schemeClr val="accent1"/>
+          </a:effectRef>
+          <a:fontRef idx="minor">
+            <a:schemeClr val="lt1"/>
+          </a:fontRef>
+        </p:style>
+        <p:txBody>
+          <a:bodyPr lIns="0" rIns="0" rtlCol="0" anchor="ctr"/>
+          <a:lstStyle/>
+          <a:p>
+            <a:pPr algn="ctr"/>
+            <a:r>
+              <a:rPr sz="2200" b="1">
+                <a:solidFill>
+                  <a:srgbClr val="FFFFFF"/>
+                </a:solidFill>
+                <a:latin typeface="Calibri"/>
+              </a:rPr>
+              <a:t>5</a:t>
+            </a:r>
+          </a:p>
+        </p:txBody>
+      </p:sp>
+      <p:sp>
+        <p:nvSpPr>
+          <p:cNvPr id="17" name="TextBox 16"/>
+          <p:cNvSpPr txBox="1"/>
+          <p:nvPr/>
+        </p:nvSpPr>
+        <p:spPr>
+          <a:xfrm>
+            <a:off x="1417320" y="4727448"/>
+            <a:ext cx="10058400" cy="320040"/>
+          </a:xfrm>
+          <a:prstGeom prst="rect">
+            <a:avLst/>
+          </a:prstGeom>
+          <a:noFill/>
+        </p:spPr>
+        <p:txBody>
+          <a:bodyPr wrap="square" lIns="45720" rIns="45720" anchor="t">
+            <a:spAutoFit/>
+          </a:bodyPr>
+          <a:lstStyle/>
+          <a:p>
+            <a:pPr algn="l"/>
+            <a:r>
+              <a:rPr sz="1600" b="1" i="0">
+                <a:solidFill>
+                  <a:srgbClr val="663399"/>
+                </a:solidFill>
+                <a:latin typeface="Calibri"/>
+              </a:rPr>
+              <a:t>strace + coredumpctl handle 'why doesn't this work' on-device</a:t>
+            </a:r>
+          </a:p>
+        </p:txBody>
+      </p:sp>
+      <p:sp>
+        <p:nvSpPr>
+          <p:cNvPr id="18" name="TextBox 17"/>
+          <p:cNvSpPr txBox="1"/>
+          <p:nvPr/>
+        </p:nvSpPr>
+        <p:spPr>
+          <a:xfrm>
+            <a:off x="1417320" y="5038344"/>
+            <a:ext cx="10058400" cy="320040"/>
+          </a:xfrm>
+          <a:prstGeom prst="rect">
+            <a:avLst/>
+          </a:prstGeom>
+          <a:noFill/>
+        </p:spPr>
+        <p:txBody>
+          <a:bodyPr wrap="square" lIns="45720" rIns="45720" anchor="t">
+            <a:spAutoFit/>
+          </a:bodyPr>
+          <a:lstStyle/>
+          <a:p>
+            <a:pPr algn="l"/>
+            <a:r>
+              <a:rPr sz="1300" b="0" i="0">
+                <a:solidFill>
+                  <a:srgbClr val="333333"/>
+                </a:solidFill>
+                <a:latin typeface="Calibri"/>
+              </a:rPr>
+              <a:t>Live trace for hangs, post-mortem core dump for crashes</a:t>
+            </a:r>
+          </a:p>
+        </p:txBody>
+      </p:sp>
+      <p:sp>
+        <p:nvSpPr>
+          <p:cNvPr id="19" name="Rounded Rectangle 18"/>
+          <p:cNvSpPr/>
+          <p:nvPr/>
+        </p:nvSpPr>
+        <p:spPr>
+          <a:xfrm>
+            <a:off x="822960" y="5669280"/>
+            <a:ext cx="10561320" cy="640080"/>
+          </a:xfrm>
+          <a:prstGeom prst="roundRect">
+            <a:avLst/>
+          </a:prstGeom>
+          <a:solidFill>
+            <a:srgbClr val="FBE6F0"/>
+          </a:solidFill>
+          <a:ln>
+            <a:noFill/>
+          </a:ln>
+          <a:effectLst/>
+        </p:spPr>
+        <p:style>
+          <a:lnRef idx="1">
+            <a:schemeClr val="accent1"/>
+          </a:lnRef>
+          <a:fillRef idx="3">
+            <a:schemeClr val="accent1"/>
+          </a:fillRef>
+          <a:effectRef idx="2">
+            <a:schemeClr val="accent1"/>
+          </a:effectRef>
+          <a:fontRef idx="minor">
+            <a:schemeClr val="lt1"/>
+          </a:fontRef>
+        </p:style>
+        <p:txBody>
+          <a:bodyPr lIns="228600" rtlCol="0" anchor="ctr"/>
+          <a:lstStyle/>
+          <a:p>
+            <a:pPr algn="ctr"/>
+            <a:r>
+              <a:rPr sz="1400" b="1" dirty="0">
+                <a:solidFill>
+                  <a:srgbClr val="663399"/>
+                </a:solidFill>
+                <a:latin typeface="Calibri"/>
+              </a:rPr>
+              <a:t>Next session  →  </a:t>
+            </a:r>
+            <a:r>
+              <a:rPr sz="1400" dirty="0">
+                <a:solidFill>
+                  <a:srgbClr val="333333"/>
+                </a:solidFill>
+                <a:latin typeface="Calibri"/>
+              </a:rPr>
+              <a:t>Performance checks on </a:t>
+            </a:r>
+            <a:r>
+              <a:rPr sz="1400">
+                <a:solidFill>
+                  <a:srgbClr val="333333"/>
+                </a:solidFill>
+                <a:latin typeface="Calibri"/>
+              </a:rPr>
+              <a:t>target </a:t>
+            </a:r>
+            <a:endParaRPr sz="1400" dirty="0">
+              <a:solidFill>
+                <a:srgbClr val="333333"/>
+              </a:solidFill>
+              <a:latin typeface="Calibri"/>
+            </a:endParaRPr>
+          </a:p>
+        </p:txBody>
+      </p:sp>
+    </p:spTree>
+  </p:cSld>
+  <p:clrMapOvr>
+    <a:masterClrMapping/>
+  </p:clrMapOvr>
+</p:sld>
+</file>
+
+<file path=ppt/slides/slide2.xml><?xml version="1.0" encoding="utf-8"?>
+<p:sld xmlns:a="http://schemas.openxmlformats.org/drawingml/2006/main" xmlns:r="http://schemas.openxmlformats.org/officeDocument/2006/relationships" xmlns:p="http://schemas.openxmlformats.org/presentationml/2006/main">
+  <p:cSld>
+    <p:spTree>
+      <p:nvGrpSpPr>
+        <p:cNvPr id="1" name=""/>
+        <p:cNvGrpSpPr/>
+        <p:nvPr/>
+      </p:nvGrpSpPr>
+      <p:grpSpPr>
+        <a:xfrm>
+          <a:off x="0" y="0"/>
+          <a:ext cx="0" cy="0"/>
+          <a:chOff x="0" y="0"/>
+          <a:chExt cx="0" cy="0"/>
+        </a:xfrm>
+      </p:grpSpPr>
+      <p:sp>
+        <p:nvSpPr>
+          <p:cNvPr id="2" name="Title 1"/>
+          <p:cNvSpPr>
+            <a:spLocks noGrp="1"/>
+          </p:cNvSpPr>
+          <p:nvPr>
+            <p:ph type="title"/>
+          </p:nvPr>
+        </p:nvSpPr>
+        <p:spPr/>
+        <p:txBody>
+          <a:bodyPr/>
+          <a:lstStyle/>
+          <a:p>
+            <a:r>
+              <a:rPr sz="3200" b="1" dirty="0">
+                <a:latin typeface="Calibri"/>
+              </a:rPr>
+              <a:t>Session Agenda</a:t>
+            </a:r>
+          </a:p>
+        </p:txBody>
+      </p:sp>
+      <p:sp>
+        <p:nvSpPr>
+          <p:cNvPr id="3" name="TextBox 2"/>
+          <p:cNvSpPr txBox="1"/>
+          <p:nvPr/>
+        </p:nvSpPr>
+        <p:spPr>
+          <a:xfrm>
+            <a:off x="822960" y="1463040"/>
+            <a:ext cx="10515600" cy="5029200"/>
+          </a:xfrm>
+          <a:prstGeom prst="rect">
+            <a:avLst/>
+          </a:prstGeom>
+          <a:noFill/>
+        </p:spPr>
+        <p:txBody>
+          <a:bodyPr wrap="square" lIns="45720" rIns="45720">
+            <a:spAutoFit/>
+          </a:bodyPr>
+          <a:lstStyle/>
+          <a:p>
+            <a:pPr>
+              <a:spcAft>
+                <a:spcPts val="600"/>
+              </a:spcAft>
+            </a:pPr>
+            <a:r>
+              <a:rPr sz="2000" b="0" i="0">
+                <a:solidFill>
+                  <a:srgbClr val="333333"/>
+                </a:solidFill>
+                <a:latin typeface="Calibri"/>
+              </a:rPr>
+              <a:t>1.  Build an app with the SDK</a:t>
+            </a:r>
+          </a:p>
+          <a:p>
+            <a:pPr>
+              <a:spcAft>
+                <a:spcPts val="600"/>
+              </a:spcAft>
+            </a:pPr>
+            <a:r>
+              <a:rPr sz="2000" b="0" i="0">
+                <a:solidFill>
+                  <a:srgbClr val="333333"/>
+                </a:solidFill>
+                <a:latin typeface="Calibri"/>
+              </a:rPr>
+              <a:t>2.  Deploy to target</a:t>
+            </a:r>
+          </a:p>
+          <a:p>
+            <a:pPr>
+              <a:spcAft>
+                <a:spcPts val="600"/>
+              </a:spcAft>
+            </a:pPr>
+            <a:r>
+              <a:rPr sz="2000" b="0" i="0">
+                <a:solidFill>
+                  <a:srgbClr val="333333"/>
+                </a:solidFill>
+                <a:latin typeface="Calibri"/>
+              </a:rPr>
+              <a:t>3.  Validate runtime dependencies</a:t>
+            </a:r>
+          </a:p>
+          <a:p>
+            <a:pPr>
+              <a:spcAft>
+                <a:spcPts val="600"/>
+              </a:spcAft>
+            </a:pPr>
+            <a:r>
+              <a:rPr sz="2000" b="0" i="0">
+                <a:solidFill>
+                  <a:srgbClr val="333333"/>
+                </a:solidFill>
+                <a:latin typeface="Calibri"/>
+              </a:rPr>
+              <a:t>4.  Remote debugging with gdb + gdbserver</a:t>
+            </a:r>
+          </a:p>
+          <a:p>
+            <a:pPr>
+              <a:spcAft>
+                <a:spcPts val="600"/>
+              </a:spcAft>
+            </a:pPr>
+            <a:r>
+              <a:rPr sz="2000" b="0" i="0">
+                <a:solidFill>
+                  <a:srgbClr val="333333"/>
+                </a:solidFill>
+                <a:latin typeface="Calibri"/>
+              </a:rPr>
+              <a:t>5.  strace — diagnosing live behavior</a:t>
+            </a:r>
+          </a:p>
+          <a:p>
+            <a:pPr>
+              <a:spcAft>
+                <a:spcPts val="600"/>
+              </a:spcAft>
+            </a:pPr>
+            <a:r>
+              <a:rPr sz="2000" b="0" i="0">
+                <a:solidFill>
+                  <a:srgbClr val="333333"/>
+                </a:solidFill>
+                <a:latin typeface="Calibri"/>
+              </a:rPr>
+              <a:t>6.  Core dumps from crashes</a:t>
+            </a:r>
+          </a:p>
+          <a:p>
+            <a:pPr>
+              <a:spcAft>
+                <a:spcPts val="600"/>
+              </a:spcAft>
+            </a:pPr>
+            <a:r>
+              <a:rPr sz="2000" b="0" i="0">
+                <a:solidFill>
+                  <a:srgbClr val="333333"/>
+                </a:solidFill>
+                <a:latin typeface="Calibri"/>
+              </a:rPr>
+              <a:t>7.  Hands-on lab</a:t>
+            </a:r>
+          </a:p>
+        </p:txBody>
+      </p:sp>
+    </p:spTree>
+  </p:cSld>
+  <p:clrMapOvr>
+    <a:masterClrMapping/>
+  </p:clrMapOvr>
+</p:sld>
+</file>
+
+<file path=ppt/slides/slide3.xml><?xml version="1.0" encoding="utf-8"?>
+<p:sld xmlns:a="http://schemas.openxmlformats.org/drawingml/2006/main" xmlns:r="http://schemas.openxmlformats.org/officeDocument/2006/relationships" xmlns:p="http://schemas.openxmlformats.org/presentationml/2006/main">
+  <p:cSld>
+    <p:spTree>
+      <p:nvGrpSpPr>
+        <p:cNvPr id="1" name=""/>
+        <p:cNvGrpSpPr/>
+        <p:nvPr/>
+      </p:nvGrpSpPr>
+      <p:grpSpPr>
+        <a:xfrm>
+          <a:off x="0" y="0"/>
+          <a:ext cx="0" cy="0"/>
+          <a:chOff x="0" y="0"/>
+          <a:chExt cx="0" cy="0"/>
+        </a:xfrm>
+      </p:grpSpPr>
+      <p:sp>
+        <p:nvSpPr>
+          <p:cNvPr id="2" name="Title 1"/>
+          <p:cNvSpPr>
+            <a:spLocks noGrp="1"/>
+          </p:cNvSpPr>
+          <p:nvPr>
+            <p:ph type="title"/>
+          </p:nvPr>
+        </p:nvSpPr>
+        <p:spPr/>
+        <p:txBody>
+          <a:bodyPr/>
+          <a:lstStyle/>
+          <a:p>
+            <a:r>
+              <a:rPr sz="3200" b="1" dirty="0">
+                <a:latin typeface="Calibri"/>
+              </a:rPr>
+              <a:t>Build with the SDK</a:t>
+            </a:r>
+          </a:p>
+        </p:txBody>
+      </p:sp>
+      <p:sp>
+        <p:nvSpPr>
+          <p:cNvPr id="3" name="TextBox 2"/>
+          <p:cNvSpPr txBox="1"/>
+          <p:nvPr/>
+        </p:nvSpPr>
+        <p:spPr>
+          <a:xfrm>
+            <a:off x="822960" y="1417320"/>
+            <a:ext cx="10515600" cy="365760"/>
+          </a:xfrm>
+          <a:prstGeom prst="rect">
+            <a:avLst/>
+          </a:prstGeom>
+          <a:noFill/>
+        </p:spPr>
+        <p:txBody>
+          <a:bodyPr wrap="square" lIns="45720" rIns="45720" anchor="t">
+            <a:spAutoFit/>
+          </a:bodyPr>
+          <a:lstStyle/>
+          <a:p>
+            <a:pPr algn="l"/>
+            <a:r>
+              <a:rPr sz="1500" b="0" i="1">
+                <a:solidFill>
+                  <a:srgbClr val="666666"/>
+                </a:solidFill>
+                <a:latin typeface="Calibri"/>
+              </a:rPr>
+              <a:t>Cross-compile against the target's sysroot.</a:t>
+            </a:r>
+          </a:p>
+        </p:txBody>
+      </p:sp>
+      <p:sp>
+        <p:nvSpPr>
+          <p:cNvPr id="4" name="Rounded Rectangle 3"/>
+          <p:cNvSpPr/>
+          <p:nvPr/>
+        </p:nvSpPr>
+        <p:spPr>
+          <a:xfrm>
+            <a:off x="822960" y="1783080"/>
+            <a:ext cx="10515600" cy="4572000"/>
+          </a:xfrm>
+          <a:prstGeom prst="roundRect">
+            <a:avLst/>
+          </a:prstGeom>
+          <a:solidFill>
+            <a:srgbClr val="F5F5F5"/>
+          </a:solidFill>
+          <a:ln w="6350">
+            <a:solidFill>
+              <a:srgbClr val="D0D0D0"/>
+            </a:solidFill>
+          </a:ln>
+          <a:effectLst/>
+        </p:spPr>
+        <p:style>
+          <a:lnRef idx="1">
+            <a:schemeClr val="accent1"/>
+          </a:lnRef>
+          <a:fillRef idx="3">
+            <a:schemeClr val="accent1"/>
+          </a:fillRef>
+          <a:effectRef idx="2">
+            <a:schemeClr val="accent1"/>
+          </a:effectRef>
+          <a:fontRef idx="minor">
+            <a:schemeClr val="lt1"/>
+          </a:fontRef>
+        </p:style>
+        <p:txBody>
+          <a:bodyPr rtlCol="0" anchor="ctr"/>
+          <a:lstStyle/>
+          <a:p>
+            <a:pPr algn="ctr"/>
+            <a:endParaRPr/>
+          </a:p>
+        </p:txBody>
+      </p:sp>
+      <p:sp>
+        <p:nvSpPr>
+          <p:cNvPr id="5" name="Rectangle 4"/>
+          <p:cNvSpPr/>
+          <p:nvPr/>
+        </p:nvSpPr>
+        <p:spPr>
+          <a:xfrm>
+            <a:off x="822960" y="1783080"/>
+            <a:ext cx="73152" cy="4572000"/>
+          </a:xfrm>
+          <a:prstGeom prst="rect">
+            <a:avLst/>
+          </a:prstGeom>
+          <a:solidFill>
+            <a:srgbClr val="CC0066"/>
+          </a:solidFill>
+          <a:ln>
+            <a:noFill/>
+          </a:ln>
+          <a:effectLst/>
+        </p:spPr>
+        <p:style>
+          <a:lnRef idx="1">
+            <a:schemeClr val="accent1"/>
+          </a:lnRef>
+          <a:fillRef idx="3">
+            <a:schemeClr val="accent1"/>
+          </a:fillRef>
+          <a:effectRef idx="2">
+            <a:schemeClr val="accent1"/>
+          </a:effectRef>
+          <a:fontRef idx="minor">
+            <a:schemeClr val="lt1"/>
+          </a:fontRef>
+        </p:style>
+        <p:txBody>
+          <a:bodyPr rtlCol="0" anchor="ctr"/>
+          <a:lstStyle/>
+          <a:p>
+            <a:pPr algn="ctr"/>
+            <a:endParaRPr/>
+          </a:p>
+        </p:txBody>
+      </p:sp>
+      <p:sp>
+        <p:nvSpPr>
+          <p:cNvPr id="6" name="TextBox 5"/>
+          <p:cNvSpPr txBox="1"/>
+          <p:nvPr/>
+        </p:nvSpPr>
+        <p:spPr>
+          <a:xfrm>
+            <a:off x="1005840" y="1874519"/>
+            <a:ext cx="10241280" cy="4339650"/>
+          </a:xfrm>
+          <a:prstGeom prst="rect">
+            <a:avLst/>
+          </a:prstGeom>
+          <a:noFill/>
+        </p:spPr>
+        <p:txBody>
+          <a:bodyPr wrap="square" lIns="45720" rIns="45720">
+            <a:spAutoFit/>
+          </a:bodyPr>
+          <a:lstStyle/>
+          <a:p>
+            <a:pPr>
+              <a:spcAft>
+                <a:spcPts val="0"/>
+              </a:spcAft>
+            </a:pPr>
+            <a:r>
+              <a:rPr sz="1200" i="1">
+                <a:solidFill>
+                  <a:srgbClr val="808080"/>
+                </a:solidFill>
+                <a:latin typeface="Consolas"/>
+              </a:rPr>
+              <a:t># Source the SDK environment (set up Day 3)</a:t>
+            </a:r>
+          </a:p>
+          <a:p>
+            <a:pPr>
+              <a:spcAft>
+                <a:spcPts val="0"/>
+              </a:spcAft>
+            </a:pPr>
+            <a:r>
+              <a:rPr sz="1200">
+                <a:solidFill>
+                  <a:srgbClr val="2D2D2D"/>
+                </a:solidFill>
+                <a:latin typeface="Consolas"/>
+              </a:rPr>
+              <a:t>source /opt/poky/5.0/environment-setup-corei7-64-poky-linux</a:t>
+            </a:r>
+          </a:p>
+          <a:p>
+            <a:pPr>
+              <a:spcAft>
+                <a:spcPts val="0"/>
+              </a:spcAft>
+            </a:pPr>
+            <a:r>
+              <a:rPr sz="1200">
+                <a:solidFill>
+                  <a:srgbClr val="2D2D2D"/>
+                </a:solidFill>
+                <a:latin typeface="Consolas"/>
+              </a:rPr>
+              <a:t> </a:t>
+            </a:r>
+          </a:p>
+          <a:p>
+            <a:pPr>
+              <a:spcAft>
+                <a:spcPts val="0"/>
+              </a:spcAft>
+            </a:pPr>
+            <a:r>
+              <a:rPr sz="1200" i="1">
+                <a:solidFill>
+                  <a:srgbClr val="808080"/>
+                </a:solidFill>
+                <a:latin typeface="Consolas"/>
+              </a:rPr>
+              <a:t># Now CC, CXX, AR, LD, sysroot are all set</a:t>
+            </a:r>
+          </a:p>
+          <a:p>
+            <a:pPr>
+              <a:spcAft>
+                <a:spcPts val="0"/>
+              </a:spcAft>
+            </a:pPr>
+            <a:r>
+              <a:rPr sz="1200">
+                <a:solidFill>
+                  <a:srgbClr val="2D2D2D"/>
+                </a:solidFill>
+                <a:latin typeface="Consolas"/>
+              </a:rPr>
+              <a:t>echo $CC</a:t>
+            </a:r>
+          </a:p>
+          <a:p>
+            <a:pPr>
+              <a:spcAft>
+                <a:spcPts val="0"/>
+              </a:spcAft>
+            </a:pPr>
+            <a:r>
+              <a:rPr sz="1200" i="1">
+                <a:solidFill>
+                  <a:srgbClr val="808080"/>
+                </a:solidFill>
+                <a:latin typeface="Consolas"/>
+              </a:rPr>
+              <a:t># x86_64-poky-linux-gcc  --sysroot=...</a:t>
+            </a:r>
+          </a:p>
+          <a:p>
+            <a:pPr>
+              <a:spcAft>
+                <a:spcPts val="0"/>
+              </a:spcAft>
+            </a:pPr>
+            <a:r>
+              <a:rPr sz="1200">
+                <a:solidFill>
+                  <a:srgbClr val="2D2D2D"/>
+                </a:solidFill>
+                <a:latin typeface="Consolas"/>
+              </a:rPr>
+              <a:t> </a:t>
+            </a:r>
+          </a:p>
+          <a:p>
+            <a:pPr>
+              <a:spcAft>
+                <a:spcPts val="0"/>
+              </a:spcAft>
+            </a:pPr>
+            <a:r>
+              <a:rPr sz="1200" i="1">
+                <a:solidFill>
+                  <a:srgbClr val="808080"/>
+                </a:solidFill>
+                <a:latin typeface="Consolas"/>
+              </a:rPr>
+              <a:t># Build a simple C program</a:t>
+            </a:r>
+          </a:p>
+          <a:p>
+            <a:pPr>
+              <a:spcAft>
+                <a:spcPts val="0"/>
+              </a:spcAft>
+            </a:pPr>
+            <a:r>
+              <a:rPr sz="1200">
+                <a:solidFill>
+                  <a:srgbClr val="2D2D2D"/>
+                </a:solidFill>
+                <a:latin typeface="Consolas"/>
+              </a:rPr>
+              <a:t>cat &gt; myapp.c &lt;&lt;'EOF'</a:t>
+            </a:r>
+          </a:p>
+          <a:p>
+            <a:pPr>
+              <a:spcAft>
+                <a:spcPts val="0"/>
+              </a:spcAft>
+            </a:pPr>
+            <a:r>
+              <a:rPr sz="1200" i="1">
+                <a:solidFill>
+                  <a:srgbClr val="808080"/>
+                </a:solidFill>
+                <a:latin typeface="Consolas"/>
+              </a:rPr>
+              <a:t>#include &lt;stdio.h&gt;</a:t>
+            </a:r>
+          </a:p>
+          <a:p>
+            <a:pPr>
+              <a:spcAft>
+                <a:spcPts val="0"/>
+              </a:spcAft>
+            </a:pPr>
+            <a:r>
+              <a:rPr sz="1200" i="1">
+                <a:solidFill>
+                  <a:srgbClr val="808080"/>
+                </a:solidFill>
+                <a:latin typeface="Consolas"/>
+              </a:rPr>
+              <a:t>#include &lt;openssl/sha.h&gt;</a:t>
+            </a:r>
+          </a:p>
+          <a:p>
+            <a:pPr>
+              <a:spcAft>
+                <a:spcPts val="0"/>
+              </a:spcAft>
+            </a:pPr>
+            <a:r>
+              <a:rPr sz="1200">
+                <a:solidFill>
+                  <a:srgbClr val="2D2D2D"/>
+                </a:solidFill>
+                <a:latin typeface="Consolas"/>
+              </a:rPr>
+              <a:t>int main() {</a:t>
+            </a:r>
+          </a:p>
+          <a:p>
+            <a:pPr>
+              <a:spcAft>
+                <a:spcPts val="0"/>
+              </a:spcAft>
+            </a:pPr>
+            <a:r>
+              <a:rPr sz="1200">
+                <a:solidFill>
+                  <a:srgbClr val="2D2D2D"/>
+                </a:solidFill>
+                <a:latin typeface="Consolas"/>
+              </a:rPr>
+              <a:t>    unsigned char hash[SHA256_DIGEST_LENGTH];</a:t>
+            </a:r>
+          </a:p>
+          <a:p>
+            <a:pPr>
+              <a:spcAft>
+                <a:spcPts val="0"/>
+              </a:spcAft>
+            </a:pPr>
+            <a:r>
+              <a:rPr sz="1200">
+                <a:solidFill>
+                  <a:srgbClr val="2D2D2D"/>
+                </a:solidFill>
+                <a:latin typeface="Consolas"/>
+              </a:rPr>
+              <a:t>    SHA256((unsigned char*)"hello", 5, hash);</a:t>
+            </a:r>
+          </a:p>
+          <a:p>
+            <a:pPr>
+              <a:spcAft>
+                <a:spcPts val="0"/>
+              </a:spcAft>
+            </a:pPr>
+            <a:r>
+              <a:rPr sz="1200">
+                <a:solidFill>
+                  <a:srgbClr val="2D2D2D"/>
+                </a:solidFill>
+                <a:latin typeface="Consolas"/>
+              </a:rPr>
+              <a:t>    printf("Hashed!\n");</a:t>
+            </a:r>
+          </a:p>
+          <a:p>
+            <a:pPr>
+              <a:spcAft>
+                <a:spcPts val="0"/>
+              </a:spcAft>
+            </a:pPr>
+            <a:r>
+              <a:rPr sz="1200">
+                <a:solidFill>
+                  <a:srgbClr val="2D2D2D"/>
+                </a:solidFill>
+                <a:latin typeface="Consolas"/>
+              </a:rPr>
+              <a:t>    return 0;</a:t>
+            </a:r>
+          </a:p>
+          <a:p>
+            <a:pPr>
+              <a:spcAft>
+                <a:spcPts val="0"/>
+              </a:spcAft>
+            </a:pPr>
+            <a:r>
+              <a:rPr sz="1200">
+                <a:solidFill>
+                  <a:srgbClr val="2D2D2D"/>
+                </a:solidFill>
+                <a:latin typeface="Consolas"/>
+              </a:rPr>
+              <a:t>}</a:t>
+            </a:r>
+          </a:p>
+          <a:p>
+            <a:pPr>
+              <a:spcAft>
+                <a:spcPts val="0"/>
+              </a:spcAft>
+            </a:pPr>
+            <a:r>
+              <a:rPr sz="1200">
+                <a:solidFill>
+                  <a:srgbClr val="2D2D2D"/>
+                </a:solidFill>
+                <a:latin typeface="Consolas"/>
+              </a:rPr>
+              <a:t>EOF</a:t>
+            </a:r>
+          </a:p>
+          <a:p>
+            <a:pPr>
+              <a:spcAft>
+                <a:spcPts val="0"/>
+              </a:spcAft>
+            </a:pPr>
+            <a:r>
+              <a:rPr sz="1200">
+                <a:solidFill>
+                  <a:srgbClr val="2D2D2D"/>
+                </a:solidFill>
+                <a:latin typeface="Consolas"/>
+              </a:rPr>
+              <a:t> </a:t>
+            </a:r>
+          </a:p>
+          <a:p>
+            <a:pPr>
+              <a:spcAft>
+                <a:spcPts val="0"/>
+              </a:spcAft>
+            </a:pPr>
+            <a:r>
+              <a:rPr sz="1200">
+                <a:solidFill>
+                  <a:srgbClr val="2D2D2D"/>
+                </a:solidFill>
+                <a:latin typeface="Consolas"/>
+              </a:rPr>
+              <a:t>$CC myapp.c -o myapp -lcrypto</a:t>
+            </a:r>
+          </a:p>
+          <a:p>
+            <a:pPr>
+              <a:spcAft>
+                <a:spcPts val="0"/>
+              </a:spcAft>
+            </a:pPr>
+            <a:r>
+              <a:rPr sz="1200">
+                <a:solidFill>
+                  <a:srgbClr val="2D2D2D"/>
+                </a:solidFill>
+                <a:latin typeface="Consolas"/>
+              </a:rPr>
+              <a:t> </a:t>
+            </a:r>
+          </a:p>
+          <a:p>
+            <a:pPr>
+              <a:spcAft>
+                <a:spcPts val="0"/>
+              </a:spcAft>
+            </a:pPr>
+            <a:r>
+              <a:rPr sz="1200">
+                <a:solidFill>
+                  <a:srgbClr val="2D2D2D"/>
+                </a:solidFill>
+                <a:latin typeface="Consolas"/>
+              </a:rPr>
+              <a:t>file myapp</a:t>
+            </a:r>
+          </a:p>
+          <a:p>
+            <a:pPr>
+              <a:spcAft>
+                <a:spcPts val="0"/>
+              </a:spcAft>
+            </a:pPr>
+            <a:r>
+              <a:rPr sz="1200" i="1">
+                <a:solidFill>
+                  <a:srgbClr val="808080"/>
+                </a:solidFill>
+                <a:latin typeface="Consolas"/>
+              </a:rPr>
+              <a:t># myapp: ELF 64-bit LSB ... for target arch ...</a:t>
+            </a:r>
+          </a:p>
+        </p:txBody>
+      </p:sp>
+    </p:spTree>
+  </p:cSld>
+  <p:clrMapOvr>
+    <a:masterClrMapping/>
+  </p:clrMapOvr>
+</p:sld>
+</file>
+
+<file path=ppt/slides/slide4.xml><?xml version="1.0" encoding="utf-8"?>
+<p:sld xmlns:a="http://schemas.openxmlformats.org/drawingml/2006/main" xmlns:r="http://schemas.openxmlformats.org/officeDocument/2006/relationships" xmlns:p="http://schemas.openxmlformats.org/presentationml/2006/main">
+  <p:cSld>
+    <p:spTree>
+      <p:nvGrpSpPr>
+        <p:cNvPr id="1" name=""/>
+        <p:cNvGrpSpPr/>
+        <p:nvPr/>
+      </p:nvGrpSpPr>
+      <p:grpSpPr>
+        <a:xfrm>
+          <a:off x="0" y="0"/>
+          <a:ext cx="0" cy="0"/>
+          <a:chOff x="0" y="0"/>
+          <a:chExt cx="0" cy="0"/>
+        </a:xfrm>
+      </p:grpSpPr>
+      <p:sp>
+        <p:nvSpPr>
+          <p:cNvPr id="2" name="Title 1"/>
+          <p:cNvSpPr>
+            <a:spLocks noGrp="1"/>
+          </p:cNvSpPr>
+          <p:nvPr>
+            <p:ph type="title"/>
+          </p:nvPr>
+        </p:nvSpPr>
+        <p:spPr/>
+        <p:txBody>
+          <a:bodyPr/>
+          <a:lstStyle/>
+          <a:p>
+            <a:r>
+              <a:rPr sz="3200" b="1" dirty="0">
+                <a:latin typeface="Calibri"/>
+              </a:rPr>
+              <a:t>Deploy to Target</a:t>
+            </a:r>
+          </a:p>
+        </p:txBody>
+      </p:sp>
+      <p:sp>
+        <p:nvSpPr>
+          <p:cNvPr id="3" name="TextBox 2"/>
+          <p:cNvSpPr txBox="1"/>
+          <p:nvPr/>
+        </p:nvSpPr>
+        <p:spPr>
+          <a:xfrm>
+            <a:off x="822960" y="1417320"/>
+            <a:ext cx="10515600" cy="365760"/>
+          </a:xfrm>
+          <a:prstGeom prst="rect">
+            <a:avLst/>
+          </a:prstGeom>
+          <a:noFill/>
+        </p:spPr>
+        <p:txBody>
+          <a:bodyPr wrap="square" lIns="45720" rIns="45720" anchor="t">
             <a:spAutoFit/>
           </a:bodyPr>
           <a:lstStyle/>
@@ -5295,6 +6905,7 @@
           <a:lstStyle/>
           <a:p>
             <a:pPr algn="ctr"/>
+            <a:endParaRPr/>
           </a:p>
         </p:txBody>
       </p:sp>
@@ -5339,6 +6950,7 @@
           <a:lstStyle/>
           <a:p>
             <a:pPr algn="ctr"/>
+            <a:endParaRPr/>
           </a:p>
         </p:txBody>
       </p:sp>
@@ -5351,7 +6963,7 @@
         <p:spPr>
           <a:xfrm>
             <a:off x="1005840" y="1874519"/>
-            <a:ext cx="10241280" cy="3931920"/>
+            <a:ext cx="10241280" cy="3539430"/>
           </a:xfrm>
           <a:prstGeom prst="rect">
             <a:avLst/>
@@ -5370,7 +6982,7 @@
               </a:spcAft>
             </a:pPr>
             <a:r>
-              <a:rPr sz="1100" i="1">
+              <a:rPr sz="1400" i="1">
                 <a:solidFill>
                   <a:srgbClr val="808080"/>
                 </a:solidFill>
@@ -5386,7 +6998,7 @@
               </a:spcAft>
             </a:pPr>
             <a:r>
-              <a:rPr sz="1100">
+              <a:rPr sz="1400">
                 <a:solidFill>
                   <a:srgbClr val="2D2D2D"/>
                 </a:solidFill>
@@ -5402,7 +7014,7 @@
               </a:spcAft>
             </a:pPr>
             <a:r>
-              <a:rPr sz="1100">
+              <a:rPr sz="1400">
                 <a:solidFill>
                   <a:srgbClr val="2D2D2D"/>
                 </a:solidFill>
@@ -5418,7 +7030,7 @@
               </a:spcAft>
             </a:pPr>
             <a:r>
-              <a:rPr sz="1100">
+              <a:rPr sz="1400">
                 <a:solidFill>
                   <a:srgbClr val="2D2D2D"/>
                 </a:solidFill>
@@ -5434,7 +7046,7 @@
               </a:spcAft>
             </a:pPr>
             <a:r>
-              <a:rPr sz="1100" i="1">
+              <a:rPr sz="1400" i="1">
                 <a:solidFill>
                   <a:srgbClr val="808080"/>
                 </a:solidFill>
@@ -5450,7 +7062,7 @@
               </a:spcAft>
             </a:pPr>
             <a:r>
-              <a:rPr sz="1100">
+              <a:rPr sz="1400">
                 <a:solidFill>
                   <a:srgbClr val="2D2D2D"/>
                 </a:solidFill>
@@ -5466,7 +7078,7 @@
               </a:spcAft>
             </a:pPr>
             <a:r>
-              <a:rPr sz="1100" i="1">
+              <a:rPr sz="1400" i="1">
                 <a:solidFill>
                   <a:srgbClr val="808080"/>
                 </a:solidFill>
@@ -5482,7 +7094,7 @@
               </a:spcAft>
             </a:pPr>
             <a:r>
-              <a:rPr sz="1100">
+              <a:rPr sz="1400">
                 <a:solidFill>
                   <a:srgbClr val="2D2D2D"/>
                 </a:solidFill>
@@ -5498,7 +7110,7 @@
               </a:spcAft>
             </a:pPr>
             <a:r>
-              <a:rPr sz="1100">
+              <a:rPr sz="1400">
                 <a:solidFill>
                   <a:srgbClr val="2D2D2D"/>
                 </a:solidFill>
@@ -5514,7 +7126,7 @@
               </a:spcAft>
             </a:pPr>
             <a:r>
-              <a:rPr sz="1100" i="1">
+              <a:rPr sz="1400" i="1">
                 <a:solidFill>
                   <a:srgbClr val="808080"/>
                 </a:solidFill>
@@ -5530,7 +7142,7 @@
               </a:spcAft>
             </a:pPr>
             <a:r>
-              <a:rPr sz="1100" i="1">
+              <a:rPr sz="1400" i="1">
                 <a:solidFill>
                   <a:srgbClr val="808080"/>
                 </a:solidFill>
@@ -5546,7 +7158,7 @@
               </a:spcAft>
             </a:pPr>
             <a:r>
-              <a:rPr sz="1100">
+              <a:rPr sz="1400">
                 <a:solidFill>
                   <a:srgbClr val="2D2D2D"/>
                 </a:solidFill>
@@ -5562,7 +7174,7 @@
               </a:spcAft>
             </a:pPr>
             <a:r>
-              <a:rPr sz="1100">
+              <a:rPr sz="1400">
                 <a:solidFill>
                   <a:srgbClr val="2D2D2D"/>
                 </a:solidFill>
@@ -5578,7 +7190,7 @@
               </a:spcAft>
             </a:pPr>
             <a:r>
-              <a:rPr sz="1100">
+              <a:rPr sz="1400">
                 <a:solidFill>
                   <a:srgbClr val="2D2D2D"/>
                 </a:solidFill>
@@ -5594,7 +7206,7 @@
               </a:spcAft>
             </a:pPr>
             <a:r>
-              <a:rPr sz="1100" i="1">
+              <a:rPr sz="1400" i="1">
                 <a:solidFill>
                   <a:srgbClr val="808080"/>
                 </a:solidFill>
@@ -5610,7 +7222,7 @@
               </a:spcAft>
             </a:pPr>
             <a:r>
-              <a:rPr sz="1100" i="1">
+              <a:rPr sz="1400" i="1">
                 <a:solidFill>
                   <a:srgbClr val="808080"/>
                 </a:solidFill>
@@ -5658,7 +7270,7 @@
           </a:fontRef>
         </p:style>
         <p:txBody>
-          <a:bodyPr rtlCol="0" anchor="ctr" lIns="228600" rIns="228600" wrap="square"/>
+          <a:bodyPr wrap="square" lIns="228600" rIns="228600" rtlCol="0" anchor="ctr"/>
           <a:lstStyle/>
           <a:p>
             <a:pPr algn="l"/>
@@ -5682,8 +7294,8 @@
 </p:sld>
 </file>
 
-<file path=ppt/slides/slide11.xml><?xml version="1.0" encoding="utf-8"?>
-<p:sld xmlns:a="http://schemas.openxmlformats.org/drawingml/2006/main" xmlns:p="http://schemas.openxmlformats.org/presentationml/2006/main" xmlns:r="http://schemas.openxmlformats.org/officeDocument/2006/relationships">
+<file path=ppt/slides/slide5.xml><?xml version="1.0" encoding="utf-8"?>
+<p:sld xmlns:a="http://schemas.openxmlformats.org/drawingml/2006/main" xmlns:r="http://schemas.openxmlformats.org/officeDocument/2006/relationships" xmlns:p="http://schemas.openxmlformats.org/presentationml/2006/main">
   <p:cSld>
     <p:spTree>
       <p:nvGrpSpPr>
@@ -5691,7 +7303,14 @@
         <p:cNvGrpSpPr/>
         <p:nvPr/>
       </p:nvGrpSpPr>
-      <p:grpSpPr/>
+      <p:grpSpPr>
+        <a:xfrm>
+          <a:off x="0" y="0"/>
+          <a:ext cx="0" cy="0"/>
+          <a:chOff x="0" y="0"/>
+          <a:chExt cx="0" cy="0"/>
+        </a:xfrm>
+      </p:grpSpPr>
       <p:sp>
         <p:nvSpPr>
           <p:cNvPr id="2" name="Title 1"/>
@@ -5708,10 +7327,7 @@
           <a:lstStyle/>
           <a:p>
             <a:r>
-              <a:rPr sz="3200" b="1">
-                <a:solidFill>
-                  <a:srgbClr val="CC0066"/>
-                </a:solidFill>
+              <a:rPr sz="3200" b="1" dirty="0">
                 <a:latin typeface="Calibri"/>
               </a:rPr>
               <a:t>Validate Runtime Dependencies</a:t>
@@ -5736,7 +7352,7 @@
           <a:noFill/>
         </p:spPr>
         <p:txBody>
-          <a:bodyPr wrap="square" anchor="t" lIns="45720" rIns="45720">
+          <a:bodyPr wrap="square" lIns="45720" rIns="45720" anchor="t">
             <a:spAutoFit/>
           </a:bodyPr>
           <a:lstStyle/>
@@ -5797,6 +7413,7 @@
           <a:lstStyle/>
           <a:p>
             <a:pPr algn="ctr"/>
+            <a:endParaRPr/>
           </a:p>
         </p:txBody>
       </p:sp>
@@ -5841,6 +7458,7 @@
           <a:lstStyle/>
           <a:p>
             <a:pPr algn="ctr"/>
+            <a:endParaRPr/>
           </a:p>
         </p:txBody>
       </p:sp>
@@ -5853,7 +7471,7 @@
         <p:spPr>
           <a:xfrm>
             <a:off x="1005840" y="1874519"/>
-            <a:ext cx="10241280" cy="4389120"/>
+            <a:ext cx="10241280" cy="3970318"/>
           </a:xfrm>
           <a:prstGeom prst="rect">
             <a:avLst/>
@@ -5872,7 +7490,7 @@
               </a:spcAft>
             </a:pPr>
             <a:r>
-              <a:rPr sz="1100" i="1">
+              <a:rPr sz="1400" i="1">
                 <a:solidFill>
                   <a:srgbClr val="808080"/>
                 </a:solidFill>
@@ -5888,7 +7506,7 @@
               </a:spcAft>
             </a:pPr>
             <a:r>
-              <a:rPr sz="1100">
+              <a:rPr sz="1400">
                 <a:solidFill>
                   <a:srgbClr val="2D2D2D"/>
                 </a:solidFill>
@@ -5904,7 +7522,7 @@
               </a:spcAft>
             </a:pPr>
             <a:r>
-              <a:rPr sz="1100" i="1">
+              <a:rPr sz="1400" i="1">
                 <a:solidFill>
                   <a:srgbClr val="808080"/>
                 </a:solidFill>
@@ -5920,7 +7538,7 @@
               </a:spcAft>
             </a:pPr>
             <a:r>
-              <a:rPr sz="1100">
+              <a:rPr sz="1400">
                 <a:solidFill>
                   <a:srgbClr val="2D2D2D"/>
                 </a:solidFill>
@@ -5936,7 +7554,7 @@
               </a:spcAft>
             </a:pPr>
             <a:r>
-              <a:rPr sz="1100" i="1">
+              <a:rPr sz="1400" i="1">
                 <a:solidFill>
                   <a:srgbClr val="808080"/>
                 </a:solidFill>
@@ -5952,7 +7570,7 @@
               </a:spcAft>
             </a:pPr>
             <a:r>
-              <a:rPr sz="1100" i="1">
+              <a:rPr sz="1400" i="1">
                 <a:solidFill>
                   <a:srgbClr val="808080"/>
                 </a:solidFill>
@@ -5968,7 +7586,7 @@
               </a:spcAft>
             </a:pPr>
             <a:r>
-              <a:rPr sz="1100">
+              <a:rPr sz="1400">
                 <a:solidFill>
                   <a:srgbClr val="2D2D2D"/>
                 </a:solidFill>
@@ -5984,7 +7602,7 @@
               </a:spcAft>
             </a:pPr>
             <a:r>
-              <a:rPr sz="1100" i="1">
+              <a:rPr sz="1400" i="1">
                 <a:solidFill>
                   <a:srgbClr val="808080"/>
                 </a:solidFill>
@@ -6000,7 +7618,7 @@
               </a:spcAft>
             </a:pPr>
             <a:r>
-              <a:rPr sz="1100">
+              <a:rPr sz="1400">
                 <a:solidFill>
                   <a:srgbClr val="2D2D2D"/>
                 </a:solidFill>
@@ -6016,7 +7634,7 @@
               </a:spcAft>
             </a:pPr>
             <a:r>
-              <a:rPr sz="1100">
+              <a:rPr sz="1400">
                 <a:solidFill>
                   <a:srgbClr val="2D2D2D"/>
                 </a:solidFill>
@@ -6032,7 +7650,7 @@
               </a:spcAft>
             </a:pPr>
             <a:r>
-              <a:rPr sz="1100">
+              <a:rPr sz="1400">
                 <a:solidFill>
                   <a:srgbClr val="2D2D2D"/>
                 </a:solidFill>
@@ -6048,7 +7666,7 @@
               </a:spcAft>
             </a:pPr>
             <a:r>
-              <a:rPr sz="1100" i="1">
+              <a:rPr sz="1400" i="1">
                 <a:solidFill>
                   <a:srgbClr val="808080"/>
                 </a:solidFill>
@@ -6064,7 +7682,7 @@
               </a:spcAft>
             </a:pPr>
             <a:r>
-              <a:rPr sz="1100">
+              <a:rPr sz="1400">
                 <a:solidFill>
                   <a:srgbClr val="2D2D2D"/>
                 </a:solidFill>
@@ -6080,7 +7698,7 @@
               </a:spcAft>
             </a:pPr>
             <a:r>
-              <a:rPr sz="1100">
+              <a:rPr sz="1400">
                 <a:solidFill>
                   <a:srgbClr val="2D2D2D"/>
                 </a:solidFill>
@@ -6096,7 +7714,7 @@
               </a:spcAft>
             </a:pPr>
             <a:r>
-              <a:rPr sz="1100" i="1">
+              <a:rPr sz="1400" i="1">
                 <a:solidFill>
                   <a:srgbClr val="808080"/>
                 </a:solidFill>
@@ -6112,7 +7730,7 @@
               </a:spcAft>
             </a:pPr>
             <a:r>
-              <a:rPr sz="1100">
+              <a:rPr sz="1400">
                 <a:solidFill>
                   <a:srgbClr val="2D2D2D"/>
                 </a:solidFill>
@@ -6128,7 +7746,7 @@
               </a:spcAft>
             </a:pPr>
             <a:r>
-              <a:rPr sz="1100" i="1">
+              <a:rPr sz="1400" i="1">
                 <a:solidFill>
                   <a:srgbClr val="808080"/>
                 </a:solidFill>
@@ -6144,7 +7762,7 @@
               </a:spcAft>
             </a:pPr>
             <a:r>
-              <a:rPr sz="1100">
+              <a:rPr sz="1400">
                 <a:solidFill>
                   <a:srgbClr val="2D2D2D"/>
                 </a:solidFill>
@@ -6163,8 +7781,8 @@
 </p:sld>
 </file>
 
-<file path=ppt/slides/slide12.xml><?xml version="1.0" encoding="utf-8"?>
-<p:sld xmlns:a="http://schemas.openxmlformats.org/drawingml/2006/main" xmlns:p="http://schemas.openxmlformats.org/presentationml/2006/main" xmlns:r="http://schemas.openxmlformats.org/officeDocument/2006/relationships">
+<file path=ppt/slides/slide6.xml><?xml version="1.0" encoding="utf-8"?>
+<p:sld xmlns:a="http://schemas.openxmlformats.org/drawingml/2006/main" xmlns:r="http://schemas.openxmlformats.org/officeDocument/2006/relationships" xmlns:p="http://schemas.openxmlformats.org/presentationml/2006/main">
   <p:cSld>
     <p:spTree>
       <p:nvGrpSpPr>
@@ -6172,7 +7790,14 @@
         <p:cNvGrpSpPr/>
         <p:nvPr/>
       </p:nvGrpSpPr>
-      <p:grpSpPr/>
+      <p:grpSpPr>
+        <a:xfrm>
+          <a:off x="0" y="0"/>
+          <a:ext cx="0" cy="0"/>
+          <a:chOff x="0" y="0"/>
+          <a:chExt cx="0" cy="0"/>
+        </a:xfrm>
+      </p:grpSpPr>
       <p:sp>
         <p:nvSpPr>
           <p:cNvPr id="2" name="Title 1"/>
@@ -6189,14 +7814,20 @@
           <a:lstStyle/>
           <a:p>
             <a:r>
-              <a:rPr sz="3200" b="1">
-                <a:solidFill>
-                  <a:srgbClr val="CC0066"/>
-                </a:solidFill>
+              <a:rPr sz="3200" b="1" dirty="0">
                 <a:latin typeface="Calibri"/>
               </a:rPr>
-              <a:t>Remote Debugging with gdbserver</a:t>
-            </a:r>
+              <a:t>Remote Debugging with </a:t>
+            </a:r>
+            <a:r>
+              <a:rPr sz="3200" b="1" dirty="0" err="1">
+                <a:latin typeface="Calibri"/>
+              </a:rPr>
+              <a:t>gdbserver</a:t>
+            </a:r>
+            <a:endParaRPr sz="3200" b="1" dirty="0">
+              <a:latin typeface="Calibri"/>
+            </a:endParaRPr>
           </a:p>
         </p:txBody>
       </p:sp>
@@ -6217,7 +7848,7 @@
           <a:noFill/>
         </p:spPr>
         <p:txBody>
-          <a:bodyPr wrap="square" anchor="t" lIns="45720" rIns="45720">
+          <a:bodyPr wrap="square" lIns="45720" rIns="45720" anchor="t">
             <a:spAutoFit/>
           </a:bodyPr>
           <a:lstStyle/>
@@ -6278,6 +7909,7 @@
           <a:lstStyle/>
           <a:p>
             <a:pPr algn="ctr"/>
+            <a:endParaRPr/>
           </a:p>
         </p:txBody>
       </p:sp>
@@ -6322,6 +7954,7 @@
           <a:lstStyle/>
           <a:p>
             <a:pPr algn="ctr"/>
+            <a:endParaRPr/>
           </a:p>
         </p:txBody>
       </p:sp>
@@ -6334,7 +7967,7 @@
         <p:spPr>
           <a:xfrm>
             <a:off x="1005840" y="1874519"/>
-            <a:ext cx="10241280" cy="4389120"/>
+            <a:ext cx="10241280" cy="4401205"/>
           </a:xfrm>
           <a:prstGeom prst="rect">
             <a:avLst/>
@@ -6353,7 +7986,7 @@
               </a:spcAft>
             </a:pPr>
             <a:r>
-              <a:rPr sz="1100" i="1">
+              <a:rPr sz="1400" i="1">
                 <a:solidFill>
                   <a:srgbClr val="808080"/>
                 </a:solidFill>
@@ -6369,7 +8002,7 @@
               </a:spcAft>
             </a:pPr>
             <a:r>
-              <a:rPr sz="1100">
+              <a:rPr sz="1400">
                 <a:solidFill>
                   <a:srgbClr val="2D2D2D"/>
                 </a:solidFill>
@@ -6385,7 +8018,7 @@
               </a:spcAft>
             </a:pPr>
             <a:r>
-              <a:rPr sz="1100" i="1">
+              <a:rPr sz="1400" i="1">
                 <a:solidFill>
                   <a:srgbClr val="808080"/>
                 </a:solidFill>
@@ -6401,7 +8034,7 @@
               </a:spcAft>
             </a:pPr>
             <a:r>
-              <a:rPr sz="1100">
+              <a:rPr sz="1400">
                 <a:solidFill>
                   <a:srgbClr val="2D2D2D"/>
                 </a:solidFill>
@@ -6417,7 +8050,7 @@
               </a:spcAft>
             </a:pPr>
             <a:r>
-              <a:rPr sz="1100" i="1">
+              <a:rPr sz="1400" i="1">
                 <a:solidFill>
                   <a:srgbClr val="808080"/>
                 </a:solidFill>
@@ -6433,7 +8066,7 @@
               </a:spcAft>
             </a:pPr>
             <a:r>
-              <a:rPr sz="1100">
+              <a:rPr sz="1400">
                 <a:solidFill>
                   <a:srgbClr val="2D2D2D"/>
                 </a:solidFill>
@@ -6449,7 +8082,7 @@
               </a:spcAft>
             </a:pPr>
             <a:r>
-              <a:rPr sz="1100" i="1">
+              <a:rPr sz="1400" i="1">
                 <a:solidFill>
                   <a:srgbClr val="808080"/>
                 </a:solidFill>
@@ -6465,7 +8098,7 @@
               </a:spcAft>
             </a:pPr>
             <a:r>
-              <a:rPr sz="1100" i="1">
+              <a:rPr sz="1400" i="1">
                 <a:solidFill>
                   <a:srgbClr val="808080"/>
                 </a:solidFill>
@@ -6481,7 +8114,7 @@
               </a:spcAft>
             </a:pPr>
             <a:r>
-              <a:rPr sz="1100" i="1">
+              <a:rPr sz="1400" i="1">
                 <a:solidFill>
                   <a:srgbClr val="808080"/>
                 </a:solidFill>
@@ -6497,7 +8130,7 @@
               </a:spcAft>
             </a:pPr>
             <a:r>
-              <a:rPr sz="1100" i="1">
+              <a:rPr sz="1400" i="1">
                 <a:solidFill>
                   <a:srgbClr val="808080"/>
                 </a:solidFill>
@@ -6513,7 +8146,7 @@
               </a:spcAft>
             </a:pPr>
             <a:r>
-              <a:rPr sz="1100">
+              <a:rPr sz="1400">
                 <a:solidFill>
                   <a:srgbClr val="2D2D2D"/>
                 </a:solidFill>
@@ -6529,7 +8162,7 @@
               </a:spcAft>
             </a:pPr>
             <a:r>
-              <a:rPr sz="1100" i="1">
+              <a:rPr sz="1400" i="1">
                 <a:solidFill>
                   <a:srgbClr val="808080"/>
                 </a:solidFill>
@@ -6545,7 +8178,7 @@
               </a:spcAft>
             </a:pPr>
             <a:r>
-              <a:rPr sz="1100" i="1">
+              <a:rPr sz="1400" i="1">
                 <a:solidFill>
                   <a:srgbClr val="808080"/>
                 </a:solidFill>
@@ -6561,7 +8194,7 @@
               </a:spcAft>
             </a:pPr>
             <a:r>
-              <a:rPr sz="1100" i="1">
+              <a:rPr sz="1400" i="1">
                 <a:solidFill>
                   <a:srgbClr val="808080"/>
                 </a:solidFill>
@@ -6577,7 +8210,7 @@
               </a:spcAft>
             </a:pPr>
             <a:r>
-              <a:rPr sz="1100">
+              <a:rPr sz="1400">
                 <a:solidFill>
                   <a:srgbClr val="2D2D2D"/>
                 </a:solidFill>
@@ -6593,7 +8226,7 @@
               </a:spcAft>
             </a:pPr>
             <a:r>
-              <a:rPr sz="1100" i="1">
+              <a:rPr sz="1400" i="1">
                 <a:solidFill>
                   <a:srgbClr val="808080"/>
                 </a:solidFill>
@@ -6609,7 +8242,7 @@
               </a:spcAft>
             </a:pPr>
             <a:r>
-              <a:rPr sz="1100" i="1">
+              <a:rPr sz="1400" i="1">
                 <a:solidFill>
                   <a:srgbClr val="808080"/>
                 </a:solidFill>
@@ -6625,7 +8258,7 @@
               </a:spcAft>
             </a:pPr>
             <a:r>
-              <a:rPr sz="1100">
+              <a:rPr sz="1400">
                 <a:solidFill>
                   <a:srgbClr val="2D2D2D"/>
                 </a:solidFill>
@@ -6641,7 +8274,7 @@
               </a:spcAft>
             </a:pPr>
             <a:r>
-              <a:rPr sz="1100">
+              <a:rPr sz="1400">
                 <a:solidFill>
                   <a:srgbClr val="2D2D2D"/>
                 </a:solidFill>
@@ -6657,7 +8290,7 @@
               </a:spcAft>
             </a:pPr>
             <a:r>
-              <a:rPr sz="1100" i="1">
+              <a:rPr sz="1400" i="1">
                 <a:solidFill>
                   <a:srgbClr val="808080"/>
                 </a:solidFill>
@@ -6676,8 +8309,8 @@
 </p:sld>
 </file>
 
-<file path=ppt/slides/slide13.xml><?xml version="1.0" encoding="utf-8"?>
-<p:sld xmlns:a="http://schemas.openxmlformats.org/drawingml/2006/main" xmlns:p="http://schemas.openxmlformats.org/presentationml/2006/main" xmlns:r="http://schemas.openxmlformats.org/officeDocument/2006/relationships">
+<file path=ppt/slides/slide7.xml><?xml version="1.0" encoding="utf-8"?>
+<p:sld xmlns:a="http://schemas.openxmlformats.org/drawingml/2006/main" xmlns:r="http://schemas.openxmlformats.org/officeDocument/2006/relationships" xmlns:p="http://schemas.openxmlformats.org/presentationml/2006/main">
   <p:cSld>
     <p:spTree>
       <p:nvGrpSpPr>
@@ -6685,7 +8318,14 @@
         <p:cNvGrpSpPr/>
         <p:nvPr/>
       </p:nvGrpSpPr>
-      <p:grpSpPr/>
+      <p:grpSpPr>
+        <a:xfrm>
+          <a:off x="0" y="0"/>
+          <a:ext cx="0" cy="0"/>
+          <a:chOff x="0" y="0"/>
+          <a:chExt cx="0" cy="0"/>
+        </a:xfrm>
+      </p:grpSpPr>
       <p:sp>
         <p:nvSpPr>
           <p:cNvPr id="2" name="Title 1"/>
@@ -6702,13 +8342,28 @@
           <a:lstStyle/>
           <a:p>
             <a:r>
-              <a:rPr sz="3200" b="1">
-                <a:solidFill>
-                  <a:srgbClr val="CC0066"/>
-                </a:solidFill>
+              <a:rPr lang="en-IN" sz="3200" b="1" dirty="0">
                 <a:latin typeface="Calibri"/>
               </a:rPr>
-              <a:t>strace — Live Behavior</a:t>
+              <a:t>S</a:t>
+            </a:r>
+            <a:r>
+              <a:rPr sz="3200" b="1" dirty="0">
+                <a:latin typeface="Calibri"/>
+              </a:rPr>
+              <a:t>trace</a:t>
+            </a:r>
+            <a:r>
+              <a:rPr lang="en-IN" sz="3200" b="1" dirty="0">
+                <a:latin typeface="Calibri"/>
+              </a:rPr>
+              <a:t>: </a:t>
+            </a:r>
+            <a:r>
+              <a:rPr sz="3200" b="1" dirty="0">
+                <a:latin typeface="Calibri"/>
+              </a:rPr>
+              <a:t>Live Behavior</a:t>
             </a:r>
           </a:p>
         </p:txBody>
@@ -6730,7 +8385,7 @@
           <a:noFill/>
         </p:spPr>
         <p:txBody>
-          <a:bodyPr wrap="square" anchor="t" lIns="45720" rIns="45720">
+          <a:bodyPr wrap="square" lIns="45720" rIns="45720" anchor="t">
             <a:spAutoFit/>
           </a:bodyPr>
           <a:lstStyle/>
@@ -6791,6 +8446,7 @@
           <a:lstStyle/>
           <a:p>
             <a:pPr algn="ctr"/>
+            <a:endParaRPr/>
           </a:p>
         </p:txBody>
       </p:sp>
@@ -6835,6 +8491,7 @@
           <a:lstStyle/>
           <a:p>
             <a:pPr algn="ctr"/>
+            <a:endParaRPr/>
           </a:p>
         </p:txBody>
       </p:sp>
@@ -6846,8 +8503,8 @@
         </p:nvSpPr>
         <p:spPr>
           <a:xfrm>
-            <a:off x="1005840" y="1874519"/>
-            <a:ext cx="10241280" cy="4389120"/>
+            <a:off x="1197864" y="1822311"/>
+            <a:ext cx="10241280" cy="4493538"/>
           </a:xfrm>
           <a:prstGeom prst="rect">
             <a:avLst/>
@@ -6866,7 +8523,7 @@
               </a:spcAft>
             </a:pPr>
             <a:r>
-              <a:rPr sz="1100" i="1">
+              <a:rPr sz="1300" i="1" dirty="0">
                 <a:solidFill>
                   <a:srgbClr val="808080"/>
                 </a:solidFill>
@@ -6882,7 +8539,7 @@
               </a:spcAft>
             </a:pPr>
             <a:r>
-              <a:rPr sz="1100">
+              <a:rPr sz="1300" dirty="0">
                 <a:solidFill>
                   <a:srgbClr val="2D2D2D"/>
                 </a:solidFill>
@@ -6898,7 +8555,7 @@
               </a:spcAft>
             </a:pPr>
             <a:r>
-              <a:rPr sz="1100" i="1">
+              <a:rPr sz="1300" i="1" dirty="0">
                 <a:solidFill>
                   <a:srgbClr val="808080"/>
                 </a:solidFill>
@@ -6914,28 +8571,52 @@
               </a:spcAft>
             </a:pPr>
             <a:r>
-              <a:rPr sz="1100">
+              <a:rPr sz="1300" dirty="0" err="1">
                 <a:solidFill>
                   <a:srgbClr val="2D2D2D"/>
                 </a:solidFill>
                 <a:latin typeface="Consolas"/>
               </a:rPr>
-              <a:t>strace ./myapp</a:t>
-            </a:r>
-          </a:p>
-          <a:p>
-            <a:pPr>
-              <a:spcAft>
-                <a:spcPts val="0"/>
-              </a:spcAft>
-            </a:pPr>
-            <a:r>
-              <a:rPr sz="1100">
+              <a:t>strace</a:t>
+            </a:r>
+            <a:r>
+              <a:rPr sz="1300" dirty="0">
                 <a:solidFill>
                   <a:srgbClr val="2D2D2D"/>
                 </a:solidFill>
                 <a:latin typeface="Consolas"/>
               </a:rPr>
+              <a:t> ./</a:t>
+            </a:r>
+            <a:r>
+              <a:rPr sz="1300" dirty="0" err="1">
+                <a:solidFill>
+                  <a:srgbClr val="2D2D2D"/>
+                </a:solidFill>
+                <a:latin typeface="Consolas"/>
+              </a:rPr>
+              <a:t>myapp</a:t>
+            </a:r>
+            <a:endParaRPr sz="1300" dirty="0">
+              <a:solidFill>
+                <a:srgbClr val="2D2D2D"/>
+              </a:solidFill>
+              <a:latin typeface="Consolas"/>
+            </a:endParaRPr>
+          </a:p>
+          <a:p>
+            <a:pPr>
+              <a:spcAft>
+                <a:spcPts val="0"/>
+              </a:spcAft>
+            </a:pPr>
+            <a:r>
+              <a:rPr sz="1300" dirty="0">
+                <a:solidFill>
+                  <a:srgbClr val="2D2D2D"/>
+                </a:solidFill>
+                <a:latin typeface="Consolas"/>
+              </a:rPr>
               <a:t> </a:t>
             </a:r>
           </a:p>
@@ -6946,76 +8627,184 @@
               </a:spcAft>
             </a:pPr>
             <a:r>
-              <a:rPr sz="1100" i="1">
+              <a:rPr sz="1300" i="1" dirty="0">
                 <a:solidFill>
                   <a:srgbClr val="808080"/>
                 </a:solidFill>
                 <a:latin typeface="Consolas"/>
               </a:rPr>
-              <a:t># Trace a specific syscall family</a:t>
-            </a:r>
-          </a:p>
-          <a:p>
-            <a:pPr>
-              <a:spcAft>
-                <a:spcPts val="0"/>
-              </a:spcAft>
-            </a:pPr>
-            <a:r>
-              <a:rPr sz="1100">
+              <a:t># Trace a specific </a:t>
+            </a:r>
+            <a:r>
+              <a:rPr sz="1300" i="1" dirty="0" err="1">
+                <a:solidFill>
+                  <a:srgbClr val="808080"/>
+                </a:solidFill>
+                <a:latin typeface="Consolas"/>
+              </a:rPr>
+              <a:t>syscall</a:t>
+            </a:r>
+            <a:r>
+              <a:rPr sz="1300" i="1" dirty="0">
+                <a:solidFill>
+                  <a:srgbClr val="808080"/>
+                </a:solidFill>
+                <a:latin typeface="Consolas"/>
+              </a:rPr>
+              <a:t> family</a:t>
+            </a:r>
+          </a:p>
+          <a:p>
+            <a:pPr>
+              <a:spcAft>
+                <a:spcPts val="0"/>
+              </a:spcAft>
+            </a:pPr>
+            <a:r>
+              <a:rPr sz="1300" dirty="0" err="1">
                 <a:solidFill>
                   <a:srgbClr val="2D2D2D"/>
                 </a:solidFill>
                 <a:latin typeface="Consolas"/>
               </a:rPr>
-              <a:t>strace -e open,openat,read ./myapp</a:t>
-            </a:r>
-          </a:p>
-          <a:p>
-            <a:pPr>
-              <a:spcAft>
-                <a:spcPts val="0"/>
-              </a:spcAft>
-            </a:pPr>
-            <a:r>
-              <a:rPr sz="1100">
+              <a:t>strace</a:t>
+            </a:r>
+            <a:r>
+              <a:rPr sz="1300" dirty="0">
                 <a:solidFill>
                   <a:srgbClr val="2D2D2D"/>
                 </a:solidFill>
                 <a:latin typeface="Consolas"/>
               </a:rPr>
-              <a:t>strace -e network ./myapp</a:t>
-            </a:r>
-          </a:p>
-          <a:p>
-            <a:pPr>
-              <a:spcAft>
-                <a:spcPts val="0"/>
-              </a:spcAft>
-            </a:pPr>
-            <a:r>
-              <a:rPr sz="1100">
+              <a:t> -e </a:t>
+            </a:r>
+            <a:r>
+              <a:rPr sz="1300" dirty="0" err="1">
                 <a:solidFill>
                   <a:srgbClr val="2D2D2D"/>
                 </a:solidFill>
                 <a:latin typeface="Consolas"/>
               </a:rPr>
-              <a:t>strace -e file ./myapp</a:t>
-            </a:r>
-          </a:p>
-          <a:p>
-            <a:pPr>
-              <a:spcAft>
-                <a:spcPts val="0"/>
-              </a:spcAft>
-            </a:pPr>
-            <a:r>
-              <a:rPr sz="1100">
+              <a:t>open,openat,read</a:t>
+            </a:r>
+            <a:r>
+              <a:rPr sz="1300" dirty="0">
                 <a:solidFill>
                   <a:srgbClr val="2D2D2D"/>
                 </a:solidFill>
                 <a:latin typeface="Consolas"/>
               </a:rPr>
+              <a:t> ./</a:t>
+            </a:r>
+            <a:r>
+              <a:rPr sz="1300" dirty="0" err="1">
+                <a:solidFill>
+                  <a:srgbClr val="2D2D2D"/>
+                </a:solidFill>
+                <a:latin typeface="Consolas"/>
+              </a:rPr>
+              <a:t>myapp</a:t>
+            </a:r>
+            <a:endParaRPr sz="1300" dirty="0">
+              <a:solidFill>
+                <a:srgbClr val="2D2D2D"/>
+              </a:solidFill>
+              <a:latin typeface="Consolas"/>
+            </a:endParaRPr>
+          </a:p>
+          <a:p>
+            <a:pPr>
+              <a:spcAft>
+                <a:spcPts val="0"/>
+              </a:spcAft>
+            </a:pPr>
+            <a:r>
+              <a:rPr sz="1300" dirty="0" err="1">
+                <a:solidFill>
+                  <a:srgbClr val="2D2D2D"/>
+                </a:solidFill>
+                <a:latin typeface="Consolas"/>
+              </a:rPr>
+              <a:t>strace</a:t>
+            </a:r>
+            <a:r>
+              <a:rPr sz="1300" dirty="0">
+                <a:solidFill>
+                  <a:srgbClr val="2D2D2D"/>
+                </a:solidFill>
+                <a:latin typeface="Consolas"/>
+              </a:rPr>
+              <a:t> -e network ./</a:t>
+            </a:r>
+            <a:r>
+              <a:rPr sz="1300" dirty="0" err="1">
+                <a:solidFill>
+                  <a:srgbClr val="2D2D2D"/>
+                </a:solidFill>
+                <a:latin typeface="Consolas"/>
+              </a:rPr>
+              <a:t>myapp</a:t>
+            </a:r>
+            <a:endParaRPr sz="1300" dirty="0">
+              <a:solidFill>
+                <a:srgbClr val="2D2D2D"/>
+              </a:solidFill>
+              <a:latin typeface="Consolas"/>
+            </a:endParaRPr>
+          </a:p>
+          <a:p>
+            <a:pPr>
+              <a:spcAft>
+                <a:spcPts val="0"/>
+              </a:spcAft>
+            </a:pPr>
+            <a:r>
+              <a:rPr sz="1300" dirty="0" err="1">
+                <a:solidFill>
+                  <a:srgbClr val="2D2D2D"/>
+                </a:solidFill>
+                <a:latin typeface="Consolas"/>
+              </a:rPr>
+              <a:t>strace</a:t>
+            </a:r>
+            <a:r>
+              <a:rPr sz="1300" dirty="0">
+                <a:solidFill>
+                  <a:srgbClr val="2D2D2D"/>
+                </a:solidFill>
+                <a:latin typeface="Consolas"/>
+              </a:rPr>
+              <a:t> -e file ./</a:t>
+            </a:r>
+            <a:r>
+              <a:rPr sz="1300" dirty="0" err="1">
+                <a:solidFill>
+                  <a:srgbClr val="2D2D2D"/>
+                </a:solidFill>
+                <a:latin typeface="Consolas"/>
+              </a:rPr>
+              <a:t>myapp</a:t>
+            </a:r>
+            <a:endParaRPr sz="1300" dirty="0">
+              <a:solidFill>
+                <a:srgbClr val="2D2D2D"/>
+              </a:solidFill>
+              <a:latin typeface="Consolas"/>
+            </a:endParaRPr>
+          </a:p>
+          <a:p>
+            <a:pPr>
+              <a:spcAft>
+                <a:spcPts val="0"/>
+              </a:spcAft>
+            </a:pPr>
+            <a:r>
+              <a:rPr sz="1300" dirty="0">
+                <a:solidFill>
+                  <a:srgbClr val="2D2D2D"/>
+                </a:solidFill>
+                <a:latin typeface="Consolas"/>
+              </a:rPr>
               <a:t> </a:t>
             </a:r>
           </a:p>
@@ -7026,7 +8815,7 @@
               </a:spcAft>
             </a:pPr>
             <a:r>
-              <a:rPr sz="1100" i="1">
+              <a:rPr sz="1300" i="1" dirty="0">
                 <a:solidFill>
                   <a:srgbClr val="808080"/>
                 </a:solidFill>
@@ -7042,39 +8831,84 @@
               </a:spcAft>
             </a:pPr>
             <a:r>
-              <a:rPr sz="1100">
+              <a:rPr sz="1300" dirty="0" err="1">
                 <a:solidFill>
                   <a:srgbClr val="2D2D2D"/>
                 </a:solidFill>
                 <a:latin typeface="Consolas"/>
               </a:rPr>
-              <a:t>strace -p $(pidof myapp)</a:t>
-            </a:r>
-          </a:p>
-          <a:p>
-            <a:pPr>
-              <a:spcAft>
-                <a:spcPts val="0"/>
-              </a:spcAft>
-            </a:pPr>
-            <a:r>
-              <a:rPr sz="1100">
+              <a:t>strace</a:t>
+            </a:r>
+            <a:r>
+              <a:rPr sz="1300" dirty="0">
                 <a:solidFill>
                   <a:srgbClr val="2D2D2D"/>
                 </a:solidFill>
                 <a:latin typeface="Consolas"/>
               </a:rPr>
+              <a:t> -p $(</a:t>
+            </a:r>
+            <a:r>
+              <a:rPr sz="1300" dirty="0" err="1">
+                <a:solidFill>
+                  <a:srgbClr val="2D2D2D"/>
+                </a:solidFill>
+                <a:latin typeface="Consolas"/>
+              </a:rPr>
+              <a:t>pidof</a:t>
+            </a:r>
+            <a:r>
+              <a:rPr sz="1300" dirty="0">
+                <a:solidFill>
+                  <a:srgbClr val="2D2D2D"/>
+                </a:solidFill>
+                <a:latin typeface="Consolas"/>
+              </a:rPr>
               <a:t> </a:t>
             </a:r>
-          </a:p>
-          <a:p>
-            <a:pPr>
-              <a:spcAft>
-                <a:spcPts val="0"/>
-              </a:spcAft>
-            </a:pPr>
-            <a:r>
-              <a:rPr sz="1100" i="1">
+            <a:r>
+              <a:rPr sz="1300" dirty="0" err="1">
+                <a:solidFill>
+                  <a:srgbClr val="2D2D2D"/>
+                </a:solidFill>
+                <a:latin typeface="Consolas"/>
+              </a:rPr>
+              <a:t>myapp</a:t>
+            </a:r>
+            <a:r>
+              <a:rPr sz="1300" dirty="0">
+                <a:solidFill>
+                  <a:srgbClr val="2D2D2D"/>
+                </a:solidFill>
+                <a:latin typeface="Consolas"/>
+              </a:rPr>
+              <a:t>)</a:t>
+            </a:r>
+          </a:p>
+          <a:p>
+            <a:pPr>
+              <a:spcAft>
+                <a:spcPts val="0"/>
+              </a:spcAft>
+            </a:pPr>
+            <a:r>
+              <a:rPr sz="1300" dirty="0">
+                <a:solidFill>
+                  <a:srgbClr val="2D2D2D"/>
+                </a:solidFill>
+                <a:latin typeface="Consolas"/>
+              </a:rPr>
+              <a:t> </a:t>
+            </a:r>
+          </a:p>
+          <a:p>
+            <a:pPr>
+              <a:spcAft>
+                <a:spcPts val="0"/>
+              </a:spcAft>
+            </a:pPr>
+            <a:r>
+              <a:rPr sz="1300" i="1" dirty="0">
                 <a:solidFill>
                   <a:srgbClr val="808080"/>
                 </a:solidFill>
@@ -7090,28 +8924,73 @@
               </a:spcAft>
             </a:pPr>
             <a:r>
-              <a:rPr sz="1100">
+              <a:rPr sz="1300" dirty="0" err="1">
                 <a:solidFill>
                   <a:srgbClr val="2D2D2D"/>
                 </a:solidFill>
                 <a:latin typeface="Consolas"/>
               </a:rPr>
-              <a:t>strace -o myapp.trace -f ./myapp     # -f follows forks</a:t>
-            </a:r>
-          </a:p>
-          <a:p>
-            <a:pPr>
-              <a:spcAft>
-                <a:spcPts val="0"/>
-              </a:spcAft>
-            </a:pPr>
-            <a:r>
-              <a:rPr sz="1100">
+              <a:t>strace</a:t>
+            </a:r>
+            <a:r>
+              <a:rPr sz="1300" dirty="0">
                 <a:solidFill>
                   <a:srgbClr val="2D2D2D"/>
                 </a:solidFill>
                 <a:latin typeface="Consolas"/>
               </a:rPr>
+              <a:t> -o </a:t>
+            </a:r>
+            <a:r>
+              <a:rPr sz="1300" dirty="0" err="1">
+                <a:solidFill>
+                  <a:srgbClr val="2D2D2D"/>
+                </a:solidFill>
+                <a:latin typeface="Consolas"/>
+              </a:rPr>
+              <a:t>myapp.trace</a:t>
+            </a:r>
+            <a:r>
+              <a:rPr sz="1300" dirty="0">
+                <a:solidFill>
+                  <a:srgbClr val="2D2D2D"/>
+                </a:solidFill>
+                <a:latin typeface="Consolas"/>
+              </a:rPr>
+              <a:t> -f ./</a:t>
+            </a:r>
+            <a:r>
+              <a:rPr sz="1300" dirty="0" err="1">
+                <a:solidFill>
+                  <a:srgbClr val="2D2D2D"/>
+                </a:solidFill>
+                <a:latin typeface="Consolas"/>
+              </a:rPr>
+              <a:t>myapp</a:t>
+            </a:r>
+            <a:r>
+              <a:rPr sz="1300" dirty="0">
+                <a:solidFill>
+                  <a:srgbClr val="2D2D2D"/>
+                </a:solidFill>
+                <a:latin typeface="Consolas"/>
+              </a:rPr>
+              <a:t>     # -f follows forks</a:t>
+            </a:r>
+          </a:p>
+          <a:p>
+            <a:pPr>
+              <a:spcAft>
+                <a:spcPts val="0"/>
+              </a:spcAft>
+            </a:pPr>
+            <a:r>
+              <a:rPr sz="1300" dirty="0">
+                <a:solidFill>
+                  <a:srgbClr val="2D2D2D"/>
+                </a:solidFill>
+                <a:latin typeface="Consolas"/>
+              </a:rPr>
               <a:t> </a:t>
             </a:r>
           </a:p>
@@ -7122,7 +9001,7 @@
               </a:spcAft>
             </a:pPr>
             <a:r>
-              <a:rPr sz="1100" i="1">
+              <a:rPr sz="1300" i="1" dirty="0">
                 <a:solidFill>
                   <a:srgbClr val="808080"/>
                 </a:solidFill>
@@ -7138,7 +9017,7 @@
               </a:spcAft>
             </a:pPr>
             <a:r>
-              <a:rPr sz="1100" i="1">
+              <a:rPr sz="1300" i="1" dirty="0">
                 <a:solidFill>
                   <a:srgbClr val="808080"/>
                 </a:solidFill>
@@ -7154,39 +9033,93 @@
               </a:spcAft>
             </a:pPr>
             <a:r>
-              <a:rPr sz="1100" i="1">
+              <a:rPr sz="1300" i="1" dirty="0">
                 <a:solidFill>
                   <a:srgbClr val="808080"/>
                 </a:solidFill>
                 <a:latin typeface="Consolas"/>
               </a:rPr>
-              <a:t># - 'Why is this hanging?' → check the last syscall (often a blocking read)</a:t>
-            </a:r>
-          </a:p>
-          <a:p>
-            <a:pPr>
-              <a:spcAft>
-                <a:spcPts val="0"/>
-              </a:spcAft>
-            </a:pPr>
-            <a:r>
-              <a:rPr sz="1100" i="1">
+              <a:t># - 'Why is this hanging?' → check the last </a:t>
+            </a:r>
+            <a:r>
+              <a:rPr sz="1300" i="1" dirty="0" err="1">
                 <a:solidFill>
                   <a:srgbClr val="808080"/>
                 </a:solidFill>
                 <a:latin typeface="Consolas"/>
               </a:rPr>
-              <a:t># - 'Why is this slow?' → count syscalls per second (strace -c)</a:t>
-            </a:r>
-          </a:p>
-          <a:p>
-            <a:pPr>
-              <a:spcAft>
-                <a:spcPts val="0"/>
-              </a:spcAft>
-            </a:pPr>
-            <a:r>
-              <a:rPr sz="1100">
+              <a:t>syscall</a:t>
+            </a:r>
+            <a:r>
+              <a:rPr sz="1300" i="1" dirty="0">
+                <a:solidFill>
+                  <a:srgbClr val="808080"/>
+                </a:solidFill>
+                <a:latin typeface="Consolas"/>
+              </a:rPr>
+              <a:t> (often a blocking read)</a:t>
+            </a:r>
+          </a:p>
+          <a:p>
+            <a:pPr>
+              <a:spcAft>
+                <a:spcPts val="0"/>
+              </a:spcAft>
+            </a:pPr>
+            <a:r>
+              <a:rPr sz="1300" i="1" dirty="0">
+                <a:solidFill>
+                  <a:srgbClr val="808080"/>
+                </a:solidFill>
+                <a:latin typeface="Consolas"/>
+              </a:rPr>
+              <a:t># - 'Why is this slow?' → count </a:t>
+            </a:r>
+            <a:r>
+              <a:rPr sz="1300" i="1" dirty="0" err="1">
+                <a:solidFill>
+                  <a:srgbClr val="808080"/>
+                </a:solidFill>
+                <a:latin typeface="Consolas"/>
+              </a:rPr>
+              <a:t>syscalls</a:t>
+            </a:r>
+            <a:r>
+              <a:rPr sz="1300" i="1" dirty="0">
+                <a:solidFill>
+                  <a:srgbClr val="808080"/>
+                </a:solidFill>
+                <a:latin typeface="Consolas"/>
+              </a:rPr>
+              <a:t> per second (</a:t>
+            </a:r>
+            <a:r>
+              <a:rPr sz="1300" i="1" dirty="0" err="1">
+                <a:solidFill>
+                  <a:srgbClr val="808080"/>
+                </a:solidFill>
+                <a:latin typeface="Consolas"/>
+              </a:rPr>
+              <a:t>strace</a:t>
+            </a:r>
+            <a:r>
+              <a:rPr sz="1300" i="1" dirty="0">
+                <a:solidFill>
+                  <a:srgbClr val="808080"/>
+                </a:solidFill>
+                <a:latin typeface="Consolas"/>
+              </a:rPr>
+              <a:t> -c)</a:t>
+            </a:r>
+          </a:p>
+          <a:p>
+            <a:pPr>
+              <a:spcAft>
+                <a:spcPts val="0"/>
+              </a:spcAft>
+            </a:pPr>
+            <a:r>
+              <a:rPr sz="1300" dirty="0">
                 <a:solidFill>
                   <a:srgbClr val="2D2D2D"/>
                 </a:solidFill>
@@ -7202,13 +9135,58 @@
               </a:spcAft>
             </a:pPr>
             <a:r>
-              <a:rPr sz="1100">
+              <a:rPr sz="1300" dirty="0" err="1">
                 <a:solidFill>
                   <a:srgbClr val="2D2D2D"/>
                 </a:solidFill>
                 <a:latin typeface="Consolas"/>
               </a:rPr>
-              <a:t>strace -c ./myapp     # summary of syscall counts and time</a:t>
+              <a:t>strace</a:t>
+            </a:r>
+            <a:r>
+              <a:rPr sz="1300" dirty="0">
+                <a:solidFill>
+                  <a:srgbClr val="2D2D2D"/>
+                </a:solidFill>
+                <a:latin typeface="Consolas"/>
+              </a:rPr>
+              <a:t> -c ./</a:t>
+            </a:r>
+            <a:r>
+              <a:rPr sz="1300" dirty="0" err="1">
+                <a:solidFill>
+                  <a:srgbClr val="2D2D2D"/>
+                </a:solidFill>
+                <a:latin typeface="Consolas"/>
+              </a:rPr>
+              <a:t>myapp</a:t>
+            </a:r>
+            <a:r>
+              <a:rPr sz="1300" dirty="0">
+                <a:solidFill>
+                  <a:srgbClr val="2D2D2D"/>
+                </a:solidFill>
+                <a:latin typeface="Consolas"/>
+              </a:rPr>
+              <a:t>     # summary of </a:t>
+            </a:r>
+            <a:r>
+              <a:rPr sz="1300" dirty="0" err="1">
+                <a:solidFill>
+                  <a:srgbClr val="2D2D2D"/>
+                </a:solidFill>
+                <a:latin typeface="Consolas"/>
+              </a:rPr>
+              <a:t>syscall</a:t>
+            </a:r>
+            <a:r>
+              <a:rPr sz="1300" dirty="0">
+                <a:solidFill>
+                  <a:srgbClr val="2D2D2D"/>
+                </a:solidFill>
+                <a:latin typeface="Consolas"/>
+              </a:rPr>
+              <a:t> counts and time</a:t>
             </a:r>
           </a:p>
         </p:txBody>
@@ -7221,8 +9199,8 @@
 </p:sld>
 </file>
 
-<file path=ppt/slides/slide14.xml><?xml version="1.0" encoding="utf-8"?>
-<p:sld xmlns:a="http://schemas.openxmlformats.org/drawingml/2006/main" xmlns:p="http://schemas.openxmlformats.org/presentationml/2006/main" xmlns:r="http://schemas.openxmlformats.org/officeDocument/2006/relationships">
+<file path=ppt/slides/slide8.xml><?xml version="1.0" encoding="utf-8"?>
+<p:sld xmlns:a="http://schemas.openxmlformats.org/drawingml/2006/main" xmlns:r="http://schemas.openxmlformats.org/officeDocument/2006/relationships" xmlns:p="http://schemas.openxmlformats.org/presentationml/2006/main">
   <p:cSld>
     <p:spTree>
       <p:nvGrpSpPr>
@@ -7230,7 +9208,14 @@
         <p:cNvGrpSpPr/>
         <p:nvPr/>
       </p:nvGrpSpPr>
-      <p:grpSpPr/>
+      <p:grpSpPr>
+        <a:xfrm>
+          <a:off x="0" y="0"/>
+          <a:ext cx="0" cy="0"/>
+          <a:chOff x="0" y="0"/>
+          <a:chExt cx="0" cy="0"/>
+        </a:xfrm>
+      </p:grpSpPr>
       <p:sp>
         <p:nvSpPr>
           <p:cNvPr id="2" name="Title 1"/>
@@ -7247,10 +9232,7 @@
           <a:lstStyle/>
           <a:p>
             <a:r>
-              <a:rPr sz="3200" b="1">
-                <a:solidFill>
-                  <a:srgbClr val="CC0066"/>
-                </a:solidFill>
+              <a:rPr sz="3200" b="1" dirty="0">
                 <a:latin typeface="Calibri"/>
               </a:rPr>
               <a:t>Core Dumps from Crashes</a:t>
@@ -7275,7 +9257,7 @@
           <a:noFill/>
         </p:spPr>
         <p:txBody>
-          <a:bodyPr wrap="square" anchor="t" lIns="45720" rIns="45720">
+          <a:bodyPr wrap="square" lIns="45720" rIns="45720" anchor="t">
             <a:spAutoFit/>
           </a:bodyPr>
           <a:lstStyle/>
@@ -7336,6 +9318,7 @@
           <a:lstStyle/>
           <a:p>
             <a:pPr algn="ctr"/>
+            <a:endParaRPr/>
           </a:p>
         </p:txBody>
       </p:sp>
@@ -7380,6 +9363,7 @@
           <a:lstStyle/>
           <a:p>
             <a:pPr algn="ctr"/>
+            <a:endParaRPr/>
           </a:p>
         </p:txBody>
       </p:sp>
@@ -7391,8 +9375,8 @@
         </p:nvSpPr>
         <p:spPr>
           <a:xfrm>
-            <a:off x="1005840" y="1874519"/>
-            <a:ext cx="10241280" cy="4389120"/>
+            <a:off x="1097280" y="1783080"/>
+            <a:ext cx="10241280" cy="4616648"/>
           </a:xfrm>
           <a:prstGeom prst="rect">
             <a:avLst/>
@@ -7411,23 +9395,59 @@
               </a:spcAft>
             </a:pPr>
             <a:r>
-              <a:rPr sz="1100" i="1">
+              <a:rPr sz="1400" i="1" dirty="0">
                 <a:solidFill>
                   <a:srgbClr val="808080"/>
                 </a:solidFill>
                 <a:latin typeface="Consolas"/>
               </a:rPr>
-              <a:t># Enable core dump capture (systemd does this if coredump.conf says Storage=external)</a:t>
-            </a:r>
-          </a:p>
-          <a:p>
-            <a:pPr>
-              <a:spcAft>
-                <a:spcPts val="0"/>
-              </a:spcAft>
-            </a:pPr>
-            <a:r>
-              <a:rPr sz="1100">
+              <a:t># Enable core dump capture (</a:t>
+            </a:r>
+            <a:r>
+              <a:rPr sz="1400" i="1" dirty="0" err="1">
+                <a:solidFill>
+                  <a:srgbClr val="808080"/>
+                </a:solidFill>
+                <a:latin typeface="Consolas"/>
+              </a:rPr>
+              <a:t>systemd</a:t>
+            </a:r>
+            <a:r>
+              <a:rPr sz="1400" i="1" dirty="0">
+                <a:solidFill>
+                  <a:srgbClr val="808080"/>
+                </a:solidFill>
+                <a:latin typeface="Consolas"/>
+              </a:rPr>
+              <a:t> does this if </a:t>
+            </a:r>
+            <a:r>
+              <a:rPr sz="1400" i="1" dirty="0" err="1">
+                <a:solidFill>
+                  <a:srgbClr val="808080"/>
+                </a:solidFill>
+                <a:latin typeface="Consolas"/>
+              </a:rPr>
+              <a:t>coredump.conf</a:t>
+            </a:r>
+            <a:r>
+              <a:rPr sz="1400" i="1" dirty="0">
+                <a:solidFill>
+                  <a:srgbClr val="808080"/>
+                </a:solidFill>
+                <a:latin typeface="Consolas"/>
+              </a:rPr>
+              <a:t> says Storage=external)</a:t>
+            </a:r>
+          </a:p>
+          <a:p>
+            <a:pPr>
+              <a:spcAft>
+                <a:spcPts val="0"/>
+              </a:spcAft>
+            </a:pPr>
+            <a:r>
+              <a:rPr sz="1400" dirty="0">
                 <a:solidFill>
                   <a:srgbClr val="2D2D2D"/>
                 </a:solidFill>
@@ -7443,7 +9463,7 @@
               </a:spcAft>
             </a:pPr>
             <a:r>
-              <a:rPr sz="1100" i="1">
+              <a:rPr sz="1400" i="1" dirty="0">
                 <a:solidFill>
                   <a:srgbClr val="808080"/>
                 </a:solidFill>
@@ -7459,39 +9479,75 @@
               </a:spcAft>
             </a:pPr>
             <a:r>
-              <a:rPr sz="1100">
+              <a:rPr sz="1400" dirty="0">
                 <a:solidFill>
                   <a:srgbClr val="2D2D2D"/>
                 </a:solidFill>
                 <a:latin typeface="Consolas"/>
               </a:rPr>
-              <a:t>kill -ABRT $(pidof myapp)</a:t>
-            </a:r>
-          </a:p>
-          <a:p>
-            <a:pPr>
-              <a:spcAft>
-                <a:spcPts val="0"/>
-              </a:spcAft>
-            </a:pPr>
-            <a:r>
-              <a:rPr sz="1100">
+              <a:t>kill -ABRT $(</a:t>
+            </a:r>
+            <a:r>
+              <a:rPr sz="1400" dirty="0" err="1">
                 <a:solidFill>
                   <a:srgbClr val="2D2D2D"/>
                 </a:solidFill>
                 <a:latin typeface="Consolas"/>
               </a:rPr>
+              <a:t>pidof</a:t>
+            </a:r>
+            <a:r>
+              <a:rPr sz="1400" dirty="0">
+                <a:solidFill>
+                  <a:srgbClr val="2D2D2D"/>
+                </a:solidFill>
+                <a:latin typeface="Consolas"/>
+              </a:rPr>
               <a:t> </a:t>
             </a:r>
-          </a:p>
-          <a:p>
-            <a:pPr>
-              <a:spcAft>
-                <a:spcPts val="0"/>
-              </a:spcAft>
-            </a:pPr>
-            <a:r>
-              <a:rPr sz="1100" i="1">
+            <a:r>
+              <a:rPr sz="1400" dirty="0" err="1">
+                <a:solidFill>
+                  <a:srgbClr val="2D2D2D"/>
+                </a:solidFill>
+                <a:latin typeface="Consolas"/>
+              </a:rPr>
+              <a:t>myapp</a:t>
+            </a:r>
+            <a:r>
+              <a:rPr sz="1400" dirty="0">
+                <a:solidFill>
+                  <a:srgbClr val="2D2D2D"/>
+                </a:solidFill>
+                <a:latin typeface="Consolas"/>
+              </a:rPr>
+              <a:t>)</a:t>
+            </a:r>
+          </a:p>
+          <a:p>
+            <a:pPr>
+              <a:spcAft>
+                <a:spcPts val="0"/>
+              </a:spcAft>
+            </a:pPr>
+            <a:r>
+              <a:rPr sz="1400" dirty="0">
+                <a:solidFill>
+                  <a:srgbClr val="2D2D2D"/>
+                </a:solidFill>
+                <a:latin typeface="Consolas"/>
+              </a:rPr>
+              <a:t> </a:t>
+            </a:r>
+          </a:p>
+          <a:p>
+            <a:pPr>
+              <a:spcAft>
+                <a:spcPts val="0"/>
+              </a:spcAft>
+            </a:pPr>
+            <a:r>
+              <a:rPr sz="1400" i="1" dirty="0">
                 <a:solidFill>
                   <a:srgbClr val="808080"/>
                 </a:solidFill>
@@ -7507,23 +9563,32 @@
               </a:spcAft>
             </a:pPr>
             <a:r>
-              <a:rPr sz="1100">
+              <a:rPr sz="1400" dirty="0" err="1">
                 <a:solidFill>
                   <a:srgbClr val="2D2D2D"/>
                 </a:solidFill>
                 <a:latin typeface="Consolas"/>
               </a:rPr>
-              <a:t>coredumpctl list</a:t>
-            </a:r>
-          </a:p>
-          <a:p>
-            <a:pPr>
-              <a:spcAft>
-                <a:spcPts val="0"/>
-              </a:spcAft>
-            </a:pPr>
-            <a:r>
-              <a:rPr sz="1100" i="1">
+              <a:t>coredumpctl</a:t>
+            </a:r>
+            <a:r>
+              <a:rPr sz="1400" dirty="0">
+                <a:solidFill>
+                  <a:srgbClr val="2D2D2D"/>
+                </a:solidFill>
+                <a:latin typeface="Consolas"/>
+              </a:rPr>
+              <a:t> list</a:t>
+            </a:r>
+          </a:p>
+          <a:p>
+            <a:pPr>
+              <a:spcAft>
+                <a:spcPts val="0"/>
+              </a:spcAft>
+            </a:pPr>
+            <a:r>
+              <a:rPr sz="1400" i="1" dirty="0">
                 <a:solidFill>
                   <a:srgbClr val="808080"/>
                 </a:solidFill>
@@ -7539,23 +9604,56 @@
               </a:spcAft>
             </a:pPr>
             <a:r>
-              <a:rPr sz="1100" i="1">
+              <a:rPr sz="1400" i="1" dirty="0">
                 <a:solidFill>
                   <a:srgbClr val="808080"/>
                 </a:solidFill>
                 <a:latin typeface="Consolas"/>
               </a:rPr>
-              <a:t># ...        4567 1000 1000 SIGABRT present /usr/local/bin/myapp</a:t>
-            </a:r>
-          </a:p>
-          <a:p>
-            <a:pPr>
-              <a:spcAft>
-                <a:spcPts val="0"/>
-              </a:spcAft>
-            </a:pPr>
-            <a:r>
-              <a:rPr sz="1100">
+              <a:t># ...        4567 1000 1000 SIGABRT present /</a:t>
+            </a:r>
+            <a:r>
+              <a:rPr sz="1400" i="1" dirty="0" err="1">
+                <a:solidFill>
+                  <a:srgbClr val="808080"/>
+                </a:solidFill>
+                <a:latin typeface="Consolas"/>
+              </a:rPr>
+              <a:t>usr</a:t>
+            </a:r>
+            <a:r>
+              <a:rPr sz="1400" i="1" dirty="0">
+                <a:solidFill>
+                  <a:srgbClr val="808080"/>
+                </a:solidFill>
+                <a:latin typeface="Consolas"/>
+              </a:rPr>
+              <a:t>/local/bin/</a:t>
+            </a:r>
+            <a:r>
+              <a:rPr sz="1400" i="1" dirty="0" err="1">
+                <a:solidFill>
+                  <a:srgbClr val="808080"/>
+                </a:solidFill>
+                <a:latin typeface="Consolas"/>
+              </a:rPr>
+              <a:t>myapp</a:t>
+            </a:r>
+            <a:endParaRPr sz="1400" i="1" dirty="0">
+              <a:solidFill>
+                <a:srgbClr val="808080"/>
+              </a:solidFill>
+              <a:latin typeface="Consolas"/>
+            </a:endParaRPr>
+          </a:p>
+          <a:p>
+            <a:pPr>
+              <a:spcAft>
+                <a:spcPts val="0"/>
+              </a:spcAft>
+            </a:pPr>
+            <a:r>
+              <a:rPr sz="1400" dirty="0">
                 <a:solidFill>
                   <a:srgbClr val="2D2D2D"/>
                 </a:solidFill>
@@ -7571,7 +9669,7 @@
               </a:spcAft>
             </a:pPr>
             <a:r>
-              <a:rPr sz="1100" i="1">
+              <a:rPr sz="1400" i="1" dirty="0">
                 <a:solidFill>
                   <a:srgbClr val="808080"/>
                 </a:solidFill>
@@ -7587,28 +9685,37 @@
               </a:spcAft>
             </a:pPr>
             <a:r>
-              <a:rPr sz="1100">
+              <a:rPr sz="1400" dirty="0" err="1">
                 <a:solidFill>
                   <a:srgbClr val="2D2D2D"/>
                 </a:solidFill>
                 <a:latin typeface="Consolas"/>
               </a:rPr>
-              <a:t>coredumpctl info 4567</a:t>
-            </a:r>
-          </a:p>
-          <a:p>
-            <a:pPr>
-              <a:spcAft>
-                <a:spcPts val="0"/>
-              </a:spcAft>
-            </a:pPr>
-            <a:r>
-              <a:rPr sz="1100">
+              <a:t>coredumpctl</a:t>
+            </a:r>
+            <a:r>
+              <a:rPr sz="1400" dirty="0">
                 <a:solidFill>
                   <a:srgbClr val="2D2D2D"/>
                 </a:solidFill>
                 <a:latin typeface="Consolas"/>
               </a:rPr>
+              <a:t> info 4567</a:t>
+            </a:r>
+          </a:p>
+          <a:p>
+            <a:pPr>
+              <a:spcAft>
+                <a:spcPts val="0"/>
+              </a:spcAft>
+            </a:pPr>
+            <a:r>
+              <a:rPr sz="1400" dirty="0">
+                <a:solidFill>
+                  <a:srgbClr val="2D2D2D"/>
+                </a:solidFill>
+                <a:latin typeface="Consolas"/>
+              </a:rPr>
               <a:t> </a:t>
             </a:r>
           </a:p>
@@ -7619,87 +9726,204 @@
               </a:spcAft>
             </a:pPr>
             <a:r>
-              <a:rPr sz="1100" i="1">
+              <a:rPr sz="1400" i="1" dirty="0">
                 <a:solidFill>
                   <a:srgbClr val="808080"/>
                 </a:solidFill>
                 <a:latin typeface="Consolas"/>
               </a:rPr>
-              <a:t># Open gdb on the core</a:t>
-            </a:r>
-          </a:p>
-          <a:p>
-            <a:pPr>
-              <a:spcAft>
-                <a:spcPts val="0"/>
-              </a:spcAft>
-            </a:pPr>
-            <a:r>
-              <a:rPr sz="1100">
+              <a:t># Open </a:t>
+            </a:r>
+            <a:r>
+              <a:rPr sz="1400" i="1" dirty="0" err="1">
+                <a:solidFill>
+                  <a:srgbClr val="808080"/>
+                </a:solidFill>
+                <a:latin typeface="Consolas"/>
+              </a:rPr>
+              <a:t>gdb</a:t>
+            </a:r>
+            <a:r>
+              <a:rPr sz="1400" i="1" dirty="0">
+                <a:solidFill>
+                  <a:srgbClr val="808080"/>
+                </a:solidFill>
+                <a:latin typeface="Consolas"/>
+              </a:rPr>
+              <a:t> on the core</a:t>
+            </a:r>
+          </a:p>
+          <a:p>
+            <a:pPr>
+              <a:spcAft>
+                <a:spcPts val="0"/>
+              </a:spcAft>
+            </a:pPr>
+            <a:r>
+              <a:rPr sz="1400" dirty="0" err="1">
                 <a:solidFill>
                   <a:srgbClr val="2D2D2D"/>
                 </a:solidFill>
                 <a:latin typeface="Consolas"/>
               </a:rPr>
-              <a:t>coredumpctl gdb 4567</a:t>
-            </a:r>
-          </a:p>
-          <a:p>
-            <a:pPr>
-              <a:spcAft>
-                <a:spcPts val="0"/>
-              </a:spcAft>
-            </a:pPr>
-            <a:r>
-              <a:rPr sz="1100" i="1">
+              <a:t>coredumpctl</a:t>
+            </a:r>
+            <a:r>
+              <a:rPr sz="1400" dirty="0">
+                <a:solidFill>
+                  <a:srgbClr val="2D2D2D"/>
+                </a:solidFill>
+                <a:latin typeface="Consolas"/>
+              </a:rPr>
+              <a:t> </a:t>
+            </a:r>
+            <a:r>
+              <a:rPr sz="1400" dirty="0" err="1">
+                <a:solidFill>
+                  <a:srgbClr val="2D2D2D"/>
+                </a:solidFill>
+                <a:latin typeface="Consolas"/>
+              </a:rPr>
+              <a:t>gdb</a:t>
+            </a:r>
+            <a:r>
+              <a:rPr sz="1400" dirty="0">
+                <a:solidFill>
+                  <a:srgbClr val="2D2D2D"/>
+                </a:solidFill>
+                <a:latin typeface="Consolas"/>
+              </a:rPr>
+              <a:t> 4567</a:t>
+            </a:r>
+          </a:p>
+          <a:p>
+            <a:pPr>
+              <a:spcAft>
+                <a:spcPts val="0"/>
+              </a:spcAft>
+            </a:pPr>
+            <a:r>
+              <a:rPr sz="1400" i="1" dirty="0">
                 <a:solidFill>
                   <a:srgbClr val="808080"/>
                 </a:solidFill>
                 <a:latin typeface="Consolas"/>
               </a:rPr>
-              <a:t># (gdb) bt full</a:t>
-            </a:r>
-          </a:p>
-          <a:p>
-            <a:pPr>
-              <a:spcAft>
-                <a:spcPts val="0"/>
-              </a:spcAft>
-            </a:pPr>
-            <a:r>
-              <a:rPr sz="1100" i="1">
+              <a:t># (</a:t>
+            </a:r>
+            <a:r>
+              <a:rPr sz="1400" i="1" dirty="0" err="1">
                 <a:solidFill>
                   <a:srgbClr val="808080"/>
                 </a:solidFill>
                 <a:latin typeface="Consolas"/>
               </a:rPr>
-              <a:t># (gdb) frame N</a:t>
-            </a:r>
-          </a:p>
-          <a:p>
-            <a:pPr>
-              <a:spcAft>
-                <a:spcPts val="0"/>
-              </a:spcAft>
-            </a:pPr>
-            <a:r>
-              <a:rPr sz="1100" i="1">
+              <a:t>gdb</a:t>
+            </a:r>
+            <a:r>
+              <a:rPr sz="1400" i="1" dirty="0">
                 <a:solidFill>
                   <a:srgbClr val="808080"/>
                 </a:solidFill>
                 <a:latin typeface="Consolas"/>
               </a:rPr>
-              <a:t># (gdb) print variable</a:t>
-            </a:r>
-          </a:p>
-          <a:p>
-            <a:pPr>
-              <a:spcAft>
-                <a:spcPts val="0"/>
-              </a:spcAft>
-            </a:pPr>
-            <a:r>
-              <a:rPr sz="1100">
+              <a:t>) </a:t>
+            </a:r>
+            <a:r>
+              <a:rPr sz="1400" i="1" dirty="0" err="1">
+                <a:solidFill>
+                  <a:srgbClr val="808080"/>
+                </a:solidFill>
+                <a:latin typeface="Consolas"/>
+              </a:rPr>
+              <a:t>bt</a:t>
+            </a:r>
+            <a:r>
+              <a:rPr sz="1400" i="1" dirty="0">
+                <a:solidFill>
+                  <a:srgbClr val="808080"/>
+                </a:solidFill>
+                <a:latin typeface="Consolas"/>
+              </a:rPr>
+              <a:t> full</a:t>
+            </a:r>
+          </a:p>
+          <a:p>
+            <a:pPr>
+              <a:spcAft>
+                <a:spcPts val="0"/>
+              </a:spcAft>
+            </a:pPr>
+            <a:r>
+              <a:rPr sz="1400" i="1" dirty="0">
+                <a:solidFill>
+                  <a:srgbClr val="808080"/>
+                </a:solidFill>
+                <a:latin typeface="Consolas"/>
+              </a:rPr>
+              <a:t># (</a:t>
+            </a:r>
+            <a:r>
+              <a:rPr sz="1400" i="1" dirty="0" err="1">
+                <a:solidFill>
+                  <a:srgbClr val="808080"/>
+                </a:solidFill>
+                <a:latin typeface="Consolas"/>
+              </a:rPr>
+              <a:t>gdb</a:t>
+            </a:r>
+            <a:r>
+              <a:rPr sz="1400" i="1" dirty="0">
+                <a:solidFill>
+                  <a:srgbClr val="808080"/>
+                </a:solidFill>
+                <a:latin typeface="Consolas"/>
+              </a:rPr>
+              <a:t>) frame N</a:t>
+            </a:r>
+          </a:p>
+          <a:p>
+            <a:pPr>
+              <a:spcAft>
+                <a:spcPts val="0"/>
+              </a:spcAft>
+            </a:pPr>
+            <a:r>
+              <a:rPr sz="1400" i="1" dirty="0">
+                <a:solidFill>
+                  <a:srgbClr val="808080"/>
+                </a:solidFill>
+                <a:latin typeface="Consolas"/>
+              </a:rPr>
+              <a:t># (</a:t>
+            </a:r>
+            <a:r>
+              <a:rPr sz="1400" i="1" dirty="0" err="1">
+                <a:solidFill>
+                  <a:srgbClr val="808080"/>
+                </a:solidFill>
+                <a:latin typeface="Consolas"/>
+              </a:rPr>
+              <a:t>gdb</a:t>
+            </a:r>
+            <a:r>
+              <a:rPr sz="1400" i="1" dirty="0">
+                <a:solidFill>
+                  <a:srgbClr val="808080"/>
+                </a:solidFill>
+                <a:latin typeface="Consolas"/>
+              </a:rPr>
+              <a:t>) print variable</a:t>
+            </a:r>
+          </a:p>
+          <a:p>
+            <a:pPr>
+              <a:spcAft>
+                <a:spcPts val="0"/>
+              </a:spcAft>
+            </a:pPr>
+            <a:r>
+              <a:rPr sz="1400" dirty="0">
                 <a:solidFill>
                   <a:srgbClr val="2D2D2D"/>
                 </a:solidFill>
@@ -7715,7 +9939,7 @@
               </a:spcAft>
             </a:pPr>
             <a:r>
-              <a:rPr sz="1100" i="1">
+              <a:rPr sz="1400" i="1" dirty="0">
                 <a:solidFill>
                   <a:srgbClr val="808080"/>
                 </a:solidFill>
@@ -7731,14 +9955,38 @@
               </a:spcAft>
             </a:pPr>
             <a:r>
-              <a:rPr sz="1100">
+              <a:rPr sz="1400" dirty="0" err="1">
                 <a:solidFill>
                   <a:srgbClr val="2D2D2D"/>
                 </a:solidFill>
                 <a:latin typeface="Consolas"/>
               </a:rPr>
-              <a:t>coredumpctl dump 4567 &gt; myapp.core</a:t>
-            </a:r>
+              <a:t>coredumpctl</a:t>
+            </a:r>
+            <a:r>
+              <a:rPr sz="1400" dirty="0">
+                <a:solidFill>
+                  <a:srgbClr val="2D2D2D"/>
+                </a:solidFill>
+                <a:latin typeface="Consolas"/>
+              </a:rPr>
+              <a:t> dump 4567 &gt; </a:t>
+            </a:r>
+            <a:r>
+              <a:rPr sz="1400" dirty="0" err="1">
+                <a:solidFill>
+                  <a:srgbClr val="2D2D2D"/>
+                </a:solidFill>
+                <a:latin typeface="Consolas"/>
+              </a:rPr>
+              <a:t>myapp.core</a:t>
+            </a:r>
+            <a:endParaRPr sz="1400" dirty="0">
+              <a:solidFill>
+                <a:srgbClr val="2D2D2D"/>
+              </a:solidFill>
+              <a:latin typeface="Consolas"/>
+            </a:endParaRPr>
           </a:p>
         </p:txBody>
       </p:sp>
@@ -7750,8 +9998,8 @@
 </p:sld>
 </file>
 
-<file path=ppt/slides/slide15.xml><?xml version="1.0" encoding="utf-8"?>
-<p:sld xmlns:a="http://schemas.openxmlformats.org/drawingml/2006/main" xmlns:p="http://schemas.openxmlformats.org/presentationml/2006/main" xmlns:r="http://schemas.openxmlformats.org/officeDocument/2006/relationships">
+<file path=ppt/slides/slide9.xml><?xml version="1.0" encoding="utf-8"?>
+<p:sld xmlns:a="http://schemas.openxmlformats.org/drawingml/2006/main" xmlns:r="http://schemas.openxmlformats.org/officeDocument/2006/relationships" xmlns:p="http://schemas.openxmlformats.org/presentationml/2006/main">
   <p:cSld>
     <p:spTree>
       <p:nvGrpSpPr>
@@ -7759,7 +10007,14 @@
         <p:cNvGrpSpPr/>
         <p:nvPr/>
       </p:nvGrpSpPr>
-      <p:grpSpPr/>
+      <p:grpSpPr>
+        <a:xfrm>
+          <a:off x="0" y="0"/>
+          <a:ext cx="0" cy="0"/>
+          <a:chOff x="0" y="0"/>
+          <a:chExt cx="0" cy="0"/>
+        </a:xfrm>
+      </p:grpSpPr>
       <p:sp>
         <p:nvSpPr>
           <p:cNvPr id="2" name="Title 1"/>
@@ -7776,10 +10031,7 @@
           <a:lstStyle/>
           <a:p>
             <a:r>
-              <a:rPr sz="3200" b="1">
-                <a:solidFill>
-                  <a:srgbClr val="CC0066"/>
-                </a:solidFill>
+              <a:rPr sz="3200" b="1" dirty="0">
                 <a:latin typeface="Calibri"/>
               </a:rPr>
               <a:t>Hands-On Lab</a:t>
@@ -7804,7 +10056,7 @@
           <a:noFill/>
         </p:spPr>
         <p:txBody>
-          <a:bodyPr wrap="square" anchor="t" lIns="45720" rIns="45720">
+          <a:bodyPr wrap="square" lIns="45720" rIns="45720" anchor="t">
             <a:spAutoFit/>
           </a:bodyPr>
           <a:lstStyle/>
@@ -7865,6 +10117,7 @@
           <a:lstStyle/>
           <a:p>
             <a:pPr algn="ctr"/>
+            <a:endParaRPr/>
           </a:p>
         </p:txBody>
       </p:sp>
@@ -7909,6 +10162,7 @@
           <a:lstStyle/>
           <a:p>
             <a:pPr algn="ctr"/>
+            <a:endParaRPr/>
           </a:p>
         </p:txBody>
       </p:sp>
@@ -7921,7 +10175,7 @@
         <p:spPr>
           <a:xfrm>
             <a:off x="1005840" y="1874519"/>
-            <a:ext cx="10241280" cy="4389120"/>
+            <a:ext cx="10241280" cy="4324261"/>
           </a:xfrm>
           <a:prstGeom prst="rect">
             <a:avLst/>
@@ -7940,7 +10194,7 @@
               </a:spcAft>
             </a:pPr>
             <a:r>
-              <a:rPr sz="1000" i="1">
+              <a:rPr sz="1100" i="1">
                 <a:solidFill>
                   <a:srgbClr val="808080"/>
                 </a:solidFill>
@@ -7956,7 +10210,7 @@
               </a:spcAft>
             </a:pPr>
             <a:r>
-              <a:rPr sz="1000">
+              <a:rPr sz="1100">
                 <a:solidFill>
                   <a:srgbClr val="2D2D2D"/>
                 </a:solidFill>
@@ -7972,7 +10226,7 @@
               </a:spcAft>
             </a:pPr>
             <a:r>
-              <a:rPr sz="1000">
+              <a:rPr sz="1100">
                 <a:solidFill>
                   <a:srgbClr val="2D2D2D"/>
                 </a:solidFill>
@@ -7988,7 +10242,7 @@
               </a:spcAft>
             </a:pPr>
             <a:r>
-              <a:rPr sz="1000" i="1">
+              <a:rPr sz="1100" i="1">
                 <a:solidFill>
                   <a:srgbClr val="808080"/>
                 </a:solidFill>
@@ -8004,7 +10258,7 @@
               </a:spcAft>
             </a:pPr>
             <a:r>
-              <a:rPr sz="1000">
+              <a:rPr sz="1100">
                 <a:solidFill>
                   <a:srgbClr val="2D2D2D"/>
                 </a:solidFill>
@@ -8020,7 +10274,7 @@
               </a:spcAft>
             </a:pPr>
             <a:r>
-              <a:rPr sz="1000">
+              <a:rPr sz="1100">
                 <a:solidFill>
                   <a:srgbClr val="2D2D2D"/>
                 </a:solidFill>
@@ -8036,7 +10290,7 @@
               </a:spcAft>
             </a:pPr>
             <a:r>
-              <a:rPr sz="1000" i="1">
+              <a:rPr sz="1100" i="1">
                 <a:solidFill>
                   <a:srgbClr val="808080"/>
                 </a:solidFill>
@@ -8052,7 +10306,7 @@
               </a:spcAft>
             </a:pPr>
             <a:r>
-              <a:rPr sz="1000">
+              <a:rPr sz="1100">
                 <a:solidFill>
                   <a:srgbClr val="2D2D2D"/>
                 </a:solidFill>
@@ -8068,7 +10322,7 @@
               </a:spcAft>
             </a:pPr>
             <a:r>
-              <a:rPr sz="1000">
+              <a:rPr sz="1100">
                 <a:solidFill>
                   <a:srgbClr val="2D2D2D"/>
                 </a:solidFill>
@@ -8084,7 +10338,7 @@
               </a:spcAft>
             </a:pPr>
             <a:r>
-              <a:rPr sz="1000">
+              <a:rPr sz="1100">
                 <a:solidFill>
                   <a:srgbClr val="2D2D2D"/>
                 </a:solidFill>
@@ -8100,7 +10354,7 @@
               </a:spcAft>
             </a:pPr>
             <a:r>
-              <a:rPr sz="1000">
+              <a:rPr sz="1100">
                 <a:solidFill>
                   <a:srgbClr val="2D2D2D"/>
                 </a:solidFill>
@@ -8116,7 +10370,7 @@
               </a:spcAft>
             </a:pPr>
             <a:r>
-              <a:rPr sz="1000" i="1">
+              <a:rPr sz="1100" i="1">
                 <a:solidFill>
                   <a:srgbClr val="808080"/>
                 </a:solidFill>
@@ -8132,7 +10386,7 @@
               </a:spcAft>
             </a:pPr>
             <a:r>
-              <a:rPr sz="1000">
+              <a:rPr sz="1100">
                 <a:solidFill>
                   <a:srgbClr val="2D2D2D"/>
                 </a:solidFill>
@@ -8148,7 +10402,7 @@
               </a:spcAft>
             </a:pPr>
             <a:r>
-              <a:rPr sz="1000">
+              <a:rPr sz="1100">
                 <a:solidFill>
                   <a:srgbClr val="2D2D2D"/>
                 </a:solidFill>
@@ -8164,7 +10418,7 @@
               </a:spcAft>
             </a:pPr>
             <a:r>
-              <a:rPr sz="1000" i="1">
+              <a:rPr sz="1100" i="1">
                 <a:solidFill>
                   <a:srgbClr val="808080"/>
                 </a:solidFill>
@@ -8180,7 +10434,7 @@
               </a:spcAft>
             </a:pPr>
             <a:r>
-              <a:rPr sz="1000">
+              <a:rPr sz="1100">
                 <a:solidFill>
                   <a:srgbClr val="2D2D2D"/>
                 </a:solidFill>
@@ -8196,7 +10450,7 @@
               </a:spcAft>
             </a:pPr>
             <a:r>
-              <a:rPr sz="1000" i="1">
+              <a:rPr sz="1100" i="1">
                 <a:solidFill>
                   <a:srgbClr val="808080"/>
                 </a:solidFill>
@@ -8212,7 +10466,7 @@
               </a:spcAft>
             </a:pPr>
             <a:r>
-              <a:rPr sz="1000" i="1">
+              <a:rPr sz="1100" i="1">
                 <a:solidFill>
                   <a:srgbClr val="808080"/>
                 </a:solidFill>
@@ -8228,7 +10482,7 @@
               </a:spcAft>
             </a:pPr>
             <a:r>
-              <a:rPr sz="1000" i="1">
+              <a:rPr sz="1100" i="1">
                 <a:solidFill>
                   <a:srgbClr val="808080"/>
                 </a:solidFill>
@@ -8244,7 +10498,7 @@
               </a:spcAft>
             </a:pPr>
             <a:r>
-              <a:rPr sz="1000" i="1">
+              <a:rPr sz="1100" i="1">
                 <a:solidFill>
                   <a:srgbClr val="808080"/>
                 </a:solidFill>
@@ -8260,7 +10514,7 @@
               </a:spcAft>
             </a:pPr>
             <a:r>
-              <a:rPr sz="1000" i="1">
+              <a:rPr sz="1100" i="1">
                 <a:solidFill>
                   <a:srgbClr val="808080"/>
                 </a:solidFill>
@@ -8276,7 +10530,7 @@
               </a:spcAft>
             </a:pPr>
             <a:r>
-              <a:rPr sz="1000" i="1">
+              <a:rPr sz="1100" i="1">
                 <a:solidFill>
                   <a:srgbClr val="808080"/>
                 </a:solidFill>
@@ -8292,7 +10546,7 @@
               </a:spcAft>
             </a:pPr>
             <a:r>
-              <a:rPr sz="1000">
+              <a:rPr sz="1100">
                 <a:solidFill>
                   <a:srgbClr val="2D2D2D"/>
                 </a:solidFill>
@@ -8308,7 +10562,7 @@
               </a:spcAft>
             </a:pPr>
             <a:r>
-              <a:rPr sz="1000" i="1">
+              <a:rPr sz="1100" i="1">
                 <a:solidFill>
                   <a:srgbClr val="808080"/>
                 </a:solidFill>
@@ -8324,1594 +10578,13 @@
               </a:spcAft>
             </a:pPr>
             <a:r>
-              <a:rPr sz="1000">
+              <a:rPr sz="1100">
                 <a:solidFill>
                   <a:srgbClr val="2D2D2D"/>
                 </a:solidFill>
                 <a:latin typeface="Consolas"/>
               </a:rPr>
               <a:t>kill -ABRT $(pidof myapp) ; coredumpctl list ; coredumpctl gdb</a:t>
-            </a:r>
-          </a:p>
-        </p:txBody>
-      </p:sp>
-    </p:spTree>
-  </p:cSld>
-  <p:clrMapOvr>
-    <a:masterClrMapping/>
-  </p:clrMapOvr>
-</p:sld>
-</file>
-
-<file path=ppt/slides/slide16.xml><?xml version="1.0" encoding="utf-8"?>
-<p:sld xmlns:a="http://schemas.openxmlformats.org/drawingml/2006/main" xmlns:p="http://schemas.openxmlformats.org/presentationml/2006/main" xmlns:r="http://schemas.openxmlformats.org/officeDocument/2006/relationships">
-  <p:cSld>
-    <p:spTree>
-      <p:nvGrpSpPr>
-        <p:cNvPr id="1" name=""/>
-        <p:cNvGrpSpPr/>
-        <p:nvPr/>
-      </p:nvGrpSpPr>
-      <p:grpSpPr/>
-      <p:sp>
-        <p:nvSpPr>
-          <p:cNvPr id="2" name="Title 1"/>
-          <p:cNvSpPr>
-            <a:spLocks noGrp="1"/>
-          </p:cNvSpPr>
-          <p:nvPr>
-            <p:ph type="title"/>
-          </p:nvPr>
-        </p:nvSpPr>
-        <p:spPr/>
-        <p:txBody>
-          <a:bodyPr/>
-          <a:lstStyle/>
-          <a:p>
-            <a:r>
-              <a:rPr sz="3200" b="1">
-                <a:solidFill>
-                  <a:srgbClr val="663399"/>
-                </a:solidFill>
-                <a:latin typeface="Calibri"/>
-              </a:rPr>
-              <a:t>Session Summary</a:t>
-            </a:r>
-          </a:p>
-        </p:txBody>
-      </p:sp>
-      <p:sp>
-        <p:nvSpPr>
-          <p:cNvPr id="3" name="TextBox 2"/>
-          <p:cNvSpPr txBox="1"/>
-          <p:nvPr/>
-        </p:nvSpPr>
-        <p:spPr>
-          <a:xfrm>
-            <a:off x="822960" y="1417320"/>
-            <a:ext cx="10515600" cy="365760"/>
-          </a:xfrm>
-          <a:prstGeom prst="rect">
-            <a:avLst/>
-          </a:prstGeom>
-          <a:noFill/>
-        </p:spPr>
-        <p:txBody>
-          <a:bodyPr wrap="square" anchor="t" lIns="45720" rIns="45720">
-            <a:spAutoFit/>
-          </a:bodyPr>
-          <a:lstStyle/>
-          <a:p>
-            <a:pPr algn="l"/>
-            <a:r>
-              <a:rPr sz="1500" b="0" i="1">
-                <a:solidFill>
-                  <a:srgbClr val="666666"/>
-                </a:solidFill>
-                <a:latin typeface="Calibri"/>
-              </a:rPr>
-              <a:t>5 things to remember from this session.</a:t>
-            </a:r>
-          </a:p>
-        </p:txBody>
-      </p:sp>
-      <p:sp>
-        <p:nvSpPr>
-          <p:cNvPr id="4" name="Rounded Rectangle 3"/>
-          <p:cNvSpPr/>
-          <p:nvPr/>
-        </p:nvSpPr>
-        <p:spPr>
-          <a:xfrm>
-            <a:off x="822960" y="1874519"/>
-            <a:ext cx="457200" cy="548640"/>
-          </a:xfrm>
-          <a:prstGeom prst="roundRect">
-            <a:avLst/>
-          </a:prstGeom>
-          <a:solidFill>
-            <a:srgbClr val="CC0066"/>
-          </a:solidFill>
-          <a:ln>
-            <a:noFill/>
-          </a:ln>
-          <a:effectLst/>
-        </p:spPr>
-        <p:style>
-          <a:lnRef idx="1">
-            <a:schemeClr val="accent1"/>
-          </a:lnRef>
-          <a:fillRef idx="3">
-            <a:schemeClr val="accent1"/>
-          </a:fillRef>
-          <a:effectRef idx="2">
-            <a:schemeClr val="accent1"/>
-          </a:effectRef>
-          <a:fontRef idx="minor">
-            <a:schemeClr val="lt1"/>
-          </a:fontRef>
-        </p:style>
-        <p:txBody>
-          <a:bodyPr rtlCol="0" anchor="ctr" lIns="0" rIns="0"/>
-          <a:lstStyle/>
-          <a:p>
-            <a:pPr algn="ctr"/>
-            <a:r>
-              <a:rPr sz="2200" b="1">
-                <a:solidFill>
-                  <a:srgbClr val="FFFFFF"/>
-                </a:solidFill>
-                <a:latin typeface="Calibri"/>
-              </a:rPr>
-              <a:t>1</a:t>
-            </a:r>
-          </a:p>
-        </p:txBody>
-      </p:sp>
-      <p:sp>
-        <p:nvSpPr>
-          <p:cNvPr id="5" name="TextBox 4"/>
-          <p:cNvSpPr txBox="1"/>
-          <p:nvPr/>
-        </p:nvSpPr>
-        <p:spPr>
-          <a:xfrm>
-            <a:off x="1417320" y="1874519"/>
-            <a:ext cx="10058400" cy="320040"/>
-          </a:xfrm>
-          <a:prstGeom prst="rect">
-            <a:avLst/>
-          </a:prstGeom>
-          <a:noFill/>
-        </p:spPr>
-        <p:txBody>
-          <a:bodyPr wrap="square" anchor="t" lIns="45720" rIns="45720">
-            <a:spAutoFit/>
-          </a:bodyPr>
-          <a:lstStyle/>
-          <a:p>
-            <a:pPr algn="l"/>
-            <a:r>
-              <a:rPr sz="1600" b="1" i="0">
-                <a:solidFill>
-                  <a:srgbClr val="663399"/>
-                </a:solidFill>
-                <a:latin typeface="Calibri"/>
-              </a:rPr>
-              <a:t>SDK-built binary needs target sysroot</a:t>
-            </a:r>
-          </a:p>
-        </p:txBody>
-      </p:sp>
-      <p:sp>
-        <p:nvSpPr>
-          <p:cNvPr id="6" name="TextBox 5"/>
-          <p:cNvSpPr txBox="1"/>
-          <p:nvPr/>
-        </p:nvSpPr>
-        <p:spPr>
-          <a:xfrm>
-            <a:off x="1417320" y="2185415"/>
-            <a:ext cx="10058400" cy="320040"/>
-          </a:xfrm>
-          <a:prstGeom prst="rect">
-            <a:avLst/>
-          </a:prstGeom>
-          <a:noFill/>
-        </p:spPr>
-        <p:txBody>
-          <a:bodyPr wrap="square" anchor="t" lIns="45720" rIns="45720">
-            <a:spAutoFit/>
-          </a:bodyPr>
-          <a:lstStyle/>
-          <a:p>
-            <a:pPr algn="l"/>
-            <a:r>
-              <a:rPr sz="1300" b="0" i="0">
-                <a:solidFill>
-                  <a:srgbClr val="333333"/>
-                </a:solidFill>
-                <a:latin typeface="Calibri"/>
-              </a:rPr>
-              <a:t>Always cross-compile in the SDK env — never link against host libs</a:t>
-            </a:r>
-          </a:p>
-        </p:txBody>
-      </p:sp>
-      <p:sp>
-        <p:nvSpPr>
-          <p:cNvPr id="7" name="Rounded Rectangle 6"/>
-          <p:cNvSpPr/>
-          <p:nvPr/>
-        </p:nvSpPr>
-        <p:spPr>
-          <a:xfrm>
-            <a:off x="822960" y="2587752"/>
-            <a:ext cx="457200" cy="548640"/>
-          </a:xfrm>
-          <a:prstGeom prst="roundRect">
-            <a:avLst/>
-          </a:prstGeom>
-          <a:solidFill>
-            <a:srgbClr val="CC0066"/>
-          </a:solidFill>
-          <a:ln>
-            <a:noFill/>
-          </a:ln>
-          <a:effectLst/>
-        </p:spPr>
-        <p:style>
-          <a:lnRef idx="1">
-            <a:schemeClr val="accent1"/>
-          </a:lnRef>
-          <a:fillRef idx="3">
-            <a:schemeClr val="accent1"/>
-          </a:fillRef>
-          <a:effectRef idx="2">
-            <a:schemeClr val="accent1"/>
-          </a:effectRef>
-          <a:fontRef idx="minor">
-            <a:schemeClr val="lt1"/>
-          </a:fontRef>
-        </p:style>
-        <p:txBody>
-          <a:bodyPr rtlCol="0" anchor="ctr" lIns="0" rIns="0"/>
-          <a:lstStyle/>
-          <a:p>
-            <a:pPr algn="ctr"/>
-            <a:r>
-              <a:rPr sz="2200" b="1">
-                <a:solidFill>
-                  <a:srgbClr val="FFFFFF"/>
-                </a:solidFill>
-                <a:latin typeface="Calibri"/>
-              </a:rPr>
-              <a:t>2</a:t>
-            </a:r>
-          </a:p>
-        </p:txBody>
-      </p:sp>
-      <p:sp>
-        <p:nvSpPr>
-          <p:cNvPr id="8" name="TextBox 7"/>
-          <p:cNvSpPr txBox="1"/>
-          <p:nvPr/>
-        </p:nvSpPr>
-        <p:spPr>
-          <a:xfrm>
-            <a:off x="1417320" y="2587752"/>
-            <a:ext cx="10058400" cy="320040"/>
-          </a:xfrm>
-          <a:prstGeom prst="rect">
-            <a:avLst/>
-          </a:prstGeom>
-          <a:noFill/>
-        </p:spPr>
-        <p:txBody>
-          <a:bodyPr wrap="square" anchor="t" lIns="45720" rIns="45720">
-            <a:spAutoFit/>
-          </a:bodyPr>
-          <a:lstStyle/>
-          <a:p>
-            <a:pPr algn="l"/>
-            <a:r>
-              <a:rPr sz="1600" b="1" i="0">
-                <a:solidFill>
-                  <a:srgbClr val="663399"/>
-                </a:solidFill>
-                <a:latin typeface="Calibri"/>
-              </a:rPr>
-              <a:t>Production deploy = packages, not scp</a:t>
-            </a:r>
-          </a:p>
-        </p:txBody>
-      </p:sp>
-      <p:sp>
-        <p:nvSpPr>
-          <p:cNvPr id="9" name="TextBox 8"/>
-          <p:cNvSpPr txBox="1"/>
-          <p:nvPr/>
-        </p:nvSpPr>
-        <p:spPr>
-          <a:xfrm>
-            <a:off x="1417320" y="2898648"/>
-            <a:ext cx="10058400" cy="320040"/>
-          </a:xfrm>
-          <a:prstGeom prst="rect">
-            <a:avLst/>
-          </a:prstGeom>
-          <a:noFill/>
-        </p:spPr>
-        <p:txBody>
-          <a:bodyPr wrap="square" anchor="t" lIns="45720" rIns="45720">
-            <a:spAutoFit/>
-          </a:bodyPr>
-          <a:lstStyle/>
-          <a:p>
-            <a:pPr algn="l"/>
-            <a:r>
-              <a:rPr sz="1300" b="0" i="0">
-                <a:solidFill>
-                  <a:srgbClr val="333333"/>
-                </a:solidFill>
-                <a:latin typeface="Calibri"/>
-              </a:rPr>
-              <a:t>Otherwise SBOM/RDEPENDS/upgrade tracking go out the window</a:t>
-            </a:r>
-          </a:p>
-        </p:txBody>
-      </p:sp>
-      <p:sp>
-        <p:nvSpPr>
-          <p:cNvPr id="10" name="Rounded Rectangle 9"/>
-          <p:cNvSpPr/>
-          <p:nvPr/>
-        </p:nvSpPr>
-        <p:spPr>
-          <a:xfrm>
-            <a:off x="822960" y="3300984"/>
-            <a:ext cx="457200" cy="548640"/>
-          </a:xfrm>
-          <a:prstGeom prst="roundRect">
-            <a:avLst/>
-          </a:prstGeom>
-          <a:solidFill>
-            <a:srgbClr val="CC0066"/>
-          </a:solidFill>
-          <a:ln>
-            <a:noFill/>
-          </a:ln>
-          <a:effectLst/>
-        </p:spPr>
-        <p:style>
-          <a:lnRef idx="1">
-            <a:schemeClr val="accent1"/>
-          </a:lnRef>
-          <a:fillRef idx="3">
-            <a:schemeClr val="accent1"/>
-          </a:fillRef>
-          <a:effectRef idx="2">
-            <a:schemeClr val="accent1"/>
-          </a:effectRef>
-          <a:fontRef idx="minor">
-            <a:schemeClr val="lt1"/>
-          </a:fontRef>
-        </p:style>
-        <p:txBody>
-          <a:bodyPr rtlCol="0" anchor="ctr" lIns="0" rIns="0"/>
-          <a:lstStyle/>
-          <a:p>
-            <a:pPr algn="ctr"/>
-            <a:r>
-              <a:rPr sz="2200" b="1">
-                <a:solidFill>
-                  <a:srgbClr val="FFFFFF"/>
-                </a:solidFill>
-                <a:latin typeface="Calibri"/>
-              </a:rPr>
-              <a:t>3</a:t>
-            </a:r>
-          </a:p>
-        </p:txBody>
-      </p:sp>
-      <p:sp>
-        <p:nvSpPr>
-          <p:cNvPr id="11" name="TextBox 10"/>
-          <p:cNvSpPr txBox="1"/>
-          <p:nvPr/>
-        </p:nvSpPr>
-        <p:spPr>
-          <a:xfrm>
-            <a:off x="1417320" y="3300984"/>
-            <a:ext cx="10058400" cy="320040"/>
-          </a:xfrm>
-          <a:prstGeom prst="rect">
-            <a:avLst/>
-          </a:prstGeom>
-          <a:noFill/>
-        </p:spPr>
-        <p:txBody>
-          <a:bodyPr wrap="square" anchor="t" lIns="45720" rIns="45720">
-            <a:spAutoFit/>
-          </a:bodyPr>
-          <a:lstStyle/>
-          <a:p>
-            <a:pPr algn="l"/>
-            <a:r>
-              <a:rPr sz="1600" b="1" i="0">
-                <a:solidFill>
-                  <a:srgbClr val="663399"/>
-                </a:solidFill>
-                <a:latin typeface="Calibri"/>
-              </a:rPr>
-              <a:t>ldd shows what shared libs are needed</a:t>
-            </a:r>
-          </a:p>
-        </p:txBody>
-      </p:sp>
-      <p:sp>
-        <p:nvSpPr>
-          <p:cNvPr id="12" name="TextBox 11"/>
-          <p:cNvSpPr txBox="1"/>
-          <p:nvPr/>
-        </p:nvSpPr>
-        <p:spPr>
-          <a:xfrm>
-            <a:off x="1417320" y="3611879"/>
-            <a:ext cx="10058400" cy="320040"/>
-          </a:xfrm>
-          <a:prstGeom prst="rect">
-            <a:avLst/>
-          </a:prstGeom>
-          <a:noFill/>
-        </p:spPr>
-        <p:txBody>
-          <a:bodyPr wrap="square" anchor="t" lIns="45720" rIns="45720">
-            <a:spAutoFit/>
-          </a:bodyPr>
-          <a:lstStyle/>
-          <a:p>
-            <a:pPr algn="l"/>
-            <a:r>
-              <a:rPr sz="1300" b="0" i="0">
-                <a:solidFill>
-                  <a:srgbClr val="333333"/>
-                </a:solidFill>
-                <a:latin typeface="Calibri"/>
-              </a:rPr>
-              <a:t>'not found' → fix RDEPENDS or install the missing package</a:t>
-            </a:r>
-          </a:p>
-        </p:txBody>
-      </p:sp>
-      <p:sp>
-        <p:nvSpPr>
-          <p:cNvPr id="13" name="Rounded Rectangle 12"/>
-          <p:cNvSpPr/>
-          <p:nvPr/>
-        </p:nvSpPr>
-        <p:spPr>
-          <a:xfrm>
-            <a:off x="822960" y="4014215"/>
-            <a:ext cx="457200" cy="548640"/>
-          </a:xfrm>
-          <a:prstGeom prst="roundRect">
-            <a:avLst/>
-          </a:prstGeom>
-          <a:solidFill>
-            <a:srgbClr val="CC0066"/>
-          </a:solidFill>
-          <a:ln>
-            <a:noFill/>
-          </a:ln>
-          <a:effectLst/>
-        </p:spPr>
-        <p:style>
-          <a:lnRef idx="1">
-            <a:schemeClr val="accent1"/>
-          </a:lnRef>
-          <a:fillRef idx="3">
-            <a:schemeClr val="accent1"/>
-          </a:fillRef>
-          <a:effectRef idx="2">
-            <a:schemeClr val="accent1"/>
-          </a:effectRef>
-          <a:fontRef idx="minor">
-            <a:schemeClr val="lt1"/>
-          </a:fontRef>
-        </p:style>
-        <p:txBody>
-          <a:bodyPr rtlCol="0" anchor="ctr" lIns="0" rIns="0"/>
-          <a:lstStyle/>
-          <a:p>
-            <a:pPr algn="ctr"/>
-            <a:r>
-              <a:rPr sz="2200" b="1">
-                <a:solidFill>
-                  <a:srgbClr val="FFFFFF"/>
-                </a:solidFill>
-                <a:latin typeface="Calibri"/>
-              </a:rPr>
-              <a:t>4</a:t>
-            </a:r>
-          </a:p>
-        </p:txBody>
-      </p:sp>
-      <p:sp>
-        <p:nvSpPr>
-          <p:cNvPr id="14" name="TextBox 13"/>
-          <p:cNvSpPr txBox="1"/>
-          <p:nvPr/>
-        </p:nvSpPr>
-        <p:spPr>
-          <a:xfrm>
-            <a:off x="1417320" y="4014215"/>
-            <a:ext cx="10058400" cy="320040"/>
-          </a:xfrm>
-          <a:prstGeom prst="rect">
-            <a:avLst/>
-          </a:prstGeom>
-          <a:noFill/>
-        </p:spPr>
-        <p:txBody>
-          <a:bodyPr wrap="square" anchor="t" lIns="45720" rIns="45720">
-            <a:spAutoFit/>
-          </a:bodyPr>
-          <a:lstStyle/>
-          <a:p>
-            <a:pPr algn="l"/>
-            <a:r>
-              <a:rPr sz="1600" b="1" i="0">
-                <a:solidFill>
-                  <a:srgbClr val="663399"/>
-                </a:solidFill>
-                <a:latin typeface="Calibri"/>
-              </a:rPr>
-              <a:t>gdbserver gives full remote debug</a:t>
-            </a:r>
-          </a:p>
-        </p:txBody>
-      </p:sp>
-      <p:sp>
-        <p:nvSpPr>
-          <p:cNvPr id="15" name="TextBox 14"/>
-          <p:cNvSpPr txBox="1"/>
-          <p:nvPr/>
-        </p:nvSpPr>
-        <p:spPr>
-          <a:xfrm>
-            <a:off x="1417320" y="4325112"/>
-            <a:ext cx="10058400" cy="320040"/>
-          </a:xfrm>
-          <a:prstGeom prst="rect">
-            <a:avLst/>
-          </a:prstGeom>
-          <a:noFill/>
-        </p:spPr>
-        <p:txBody>
-          <a:bodyPr wrap="square" anchor="t" lIns="45720" rIns="45720">
-            <a:spAutoFit/>
-          </a:bodyPr>
-          <a:lstStyle/>
-          <a:p>
-            <a:pPr algn="l"/>
-            <a:r>
-              <a:rPr sz="1300" b="0" i="0">
-                <a:solidFill>
-                  <a:srgbClr val="333333"/>
-                </a:solidFill>
-                <a:latin typeface="Calibri"/>
-              </a:rPr>
-              <a:t>Pair with target sysroot in gdb; install -dbg packages for symbols</a:t>
-            </a:r>
-          </a:p>
-        </p:txBody>
-      </p:sp>
-      <p:sp>
-        <p:nvSpPr>
-          <p:cNvPr id="16" name="Rounded Rectangle 15"/>
-          <p:cNvSpPr/>
-          <p:nvPr/>
-        </p:nvSpPr>
-        <p:spPr>
-          <a:xfrm>
-            <a:off x="822960" y="4727448"/>
-            <a:ext cx="457200" cy="548640"/>
-          </a:xfrm>
-          <a:prstGeom prst="roundRect">
-            <a:avLst/>
-          </a:prstGeom>
-          <a:solidFill>
-            <a:srgbClr val="CC0066"/>
-          </a:solidFill>
-          <a:ln>
-            <a:noFill/>
-          </a:ln>
-          <a:effectLst/>
-        </p:spPr>
-        <p:style>
-          <a:lnRef idx="1">
-            <a:schemeClr val="accent1"/>
-          </a:lnRef>
-          <a:fillRef idx="3">
-            <a:schemeClr val="accent1"/>
-          </a:fillRef>
-          <a:effectRef idx="2">
-            <a:schemeClr val="accent1"/>
-          </a:effectRef>
-          <a:fontRef idx="minor">
-            <a:schemeClr val="lt1"/>
-          </a:fontRef>
-        </p:style>
-        <p:txBody>
-          <a:bodyPr rtlCol="0" anchor="ctr" lIns="0" rIns="0"/>
-          <a:lstStyle/>
-          <a:p>
-            <a:pPr algn="ctr"/>
-            <a:r>
-              <a:rPr sz="2200" b="1">
-                <a:solidFill>
-                  <a:srgbClr val="FFFFFF"/>
-                </a:solidFill>
-                <a:latin typeface="Calibri"/>
-              </a:rPr>
-              <a:t>5</a:t>
-            </a:r>
-          </a:p>
-        </p:txBody>
-      </p:sp>
-      <p:sp>
-        <p:nvSpPr>
-          <p:cNvPr id="17" name="TextBox 16"/>
-          <p:cNvSpPr txBox="1"/>
-          <p:nvPr/>
-        </p:nvSpPr>
-        <p:spPr>
-          <a:xfrm>
-            <a:off x="1417320" y="4727448"/>
-            <a:ext cx="10058400" cy="320040"/>
-          </a:xfrm>
-          <a:prstGeom prst="rect">
-            <a:avLst/>
-          </a:prstGeom>
-          <a:noFill/>
-        </p:spPr>
-        <p:txBody>
-          <a:bodyPr wrap="square" anchor="t" lIns="45720" rIns="45720">
-            <a:spAutoFit/>
-          </a:bodyPr>
-          <a:lstStyle/>
-          <a:p>
-            <a:pPr algn="l"/>
-            <a:r>
-              <a:rPr sz="1600" b="1" i="0">
-                <a:solidFill>
-                  <a:srgbClr val="663399"/>
-                </a:solidFill>
-                <a:latin typeface="Calibri"/>
-              </a:rPr>
-              <a:t>strace + coredumpctl handle 'why doesn't this work' on-device</a:t>
-            </a:r>
-          </a:p>
-        </p:txBody>
-      </p:sp>
-      <p:sp>
-        <p:nvSpPr>
-          <p:cNvPr id="18" name="TextBox 17"/>
-          <p:cNvSpPr txBox="1"/>
-          <p:nvPr/>
-        </p:nvSpPr>
-        <p:spPr>
-          <a:xfrm>
-            <a:off x="1417320" y="5038344"/>
-            <a:ext cx="10058400" cy="320040"/>
-          </a:xfrm>
-          <a:prstGeom prst="rect">
-            <a:avLst/>
-          </a:prstGeom>
-          <a:noFill/>
-        </p:spPr>
-        <p:txBody>
-          <a:bodyPr wrap="square" anchor="t" lIns="45720" rIns="45720">
-            <a:spAutoFit/>
-          </a:bodyPr>
-          <a:lstStyle/>
-          <a:p>
-            <a:pPr algn="l"/>
-            <a:r>
-              <a:rPr sz="1300" b="0" i="0">
-                <a:solidFill>
-                  <a:srgbClr val="333333"/>
-                </a:solidFill>
-                <a:latin typeface="Calibri"/>
-              </a:rPr>
-              <a:t>Live trace for hangs, post-mortem core dump for crashes</a:t>
-            </a:r>
-          </a:p>
-        </p:txBody>
-      </p:sp>
-      <p:sp>
-        <p:nvSpPr>
-          <p:cNvPr id="19" name="Rounded Rectangle 18"/>
-          <p:cNvSpPr/>
-          <p:nvPr/>
-        </p:nvSpPr>
-        <p:spPr>
-          <a:xfrm>
-            <a:off x="822960" y="5669280"/>
-            <a:ext cx="10561320" cy="640080"/>
-          </a:xfrm>
-          <a:prstGeom prst="roundRect">
-            <a:avLst/>
-          </a:prstGeom>
-          <a:solidFill>
-            <a:srgbClr val="FBE6F0"/>
-          </a:solidFill>
-          <a:ln>
-            <a:noFill/>
-          </a:ln>
-          <a:effectLst/>
-        </p:spPr>
-        <p:style>
-          <a:lnRef idx="1">
-            <a:schemeClr val="accent1"/>
-          </a:lnRef>
-          <a:fillRef idx="3">
-            <a:schemeClr val="accent1"/>
-          </a:fillRef>
-          <a:effectRef idx="2">
-            <a:schemeClr val="accent1"/>
-          </a:effectRef>
-          <a:fontRef idx="minor">
-            <a:schemeClr val="lt1"/>
-          </a:fontRef>
-        </p:style>
-        <p:txBody>
-          <a:bodyPr rtlCol="0" anchor="ctr" lIns="228600"/>
-          <a:lstStyle/>
-          <a:p>
-            <a:pPr algn="ctr"/>
-            <a:r>
-              <a:rPr sz="1400" b="1">
-                <a:solidFill>
-                  <a:srgbClr val="663399"/>
-                </a:solidFill>
-                <a:latin typeface="Calibri"/>
-              </a:rPr>
-              <a:t>Next session  →  </a:t>
-            </a:r>
-            <a:r>
-              <a:rPr sz="1400">
-                <a:solidFill>
-                  <a:srgbClr val="333333"/>
-                </a:solidFill>
-                <a:latin typeface="Calibri"/>
-              </a:rPr>
-              <a:t>Performance checks on target (75 min)</a:t>
-            </a:r>
-          </a:p>
-        </p:txBody>
-      </p:sp>
-    </p:spTree>
-  </p:cSld>
-  <p:clrMapOvr>
-    <a:masterClrMapping/>
-  </p:clrMapOvr>
-</p:sld>
-</file>
-
-<file path=ppt/slides/slide7.xml><?xml version="1.0" encoding="utf-8"?>
-<p:sld xmlns:a="http://schemas.openxmlformats.org/drawingml/2006/main" xmlns:p="http://schemas.openxmlformats.org/presentationml/2006/main" xmlns:r="http://schemas.openxmlformats.org/officeDocument/2006/relationships">
-  <p:cSld>
-    <p:spTree>
-      <p:nvGrpSpPr>
-        <p:cNvPr id="1" name=""/>
-        <p:cNvGrpSpPr/>
-        <p:nvPr/>
-      </p:nvGrpSpPr>
-      <p:grpSpPr/>
-      <p:sp>
-        <p:nvSpPr>
-          <p:cNvPr id="2" name="Title 1"/>
-          <p:cNvSpPr>
-            <a:spLocks noGrp="1"/>
-          </p:cNvSpPr>
-          <p:nvPr>
-            <p:ph type="ctrTitle"/>
-          </p:nvPr>
-        </p:nvSpPr>
-        <p:spPr/>
-        <p:txBody>
-          <a:bodyPr/>
-          <a:lstStyle/>
-          <a:p>
-            <a:r>
-              <a:rPr sz="4400" b="1">
-                <a:solidFill>
-                  <a:srgbClr val="FFFFFF"/>
-                </a:solidFill>
-                <a:latin typeface="Calibri"/>
-              </a:rPr>
-              <a:t>Deploy &amp; Debug Applications</a:t>
-            </a:r>
-          </a:p>
-        </p:txBody>
-      </p:sp>
-      <p:sp>
-        <p:nvSpPr>
-          <p:cNvPr id="3" name="Subtitle 2"/>
-          <p:cNvSpPr>
-            <a:spLocks noGrp="1"/>
-          </p:cNvSpPr>
-          <p:nvPr>
-            <p:ph type="subTitle" idx="1"/>
-          </p:nvPr>
-        </p:nvSpPr>
-        <p:spPr/>
-        <p:txBody>
-          <a:bodyPr/>
-          <a:lstStyle/>
-          <a:p>
-            <a:r>
-              <a:rPr sz="2200" i="1">
-                <a:solidFill>
-                  <a:srgbClr val="FFFFFF"/>
-                </a:solidFill>
-                <a:latin typeface="Calibri"/>
-              </a:rPr>
-              <a:t>Day 4 • Session 4 • 90 minutes</a:t>
-            </a:r>
-          </a:p>
-          <a:p>
-            <a:r>
-              <a:rPr sz="1800">
-                <a:solidFill>
-                  <a:srgbClr val="FFFFFF"/>
-                </a:solidFill>
-                <a:latin typeface="Calibri"/>
-              </a:rPr>
-              <a:t>From SDK build to debugging on the target</a:t>
-            </a:r>
-          </a:p>
-        </p:txBody>
-      </p:sp>
-    </p:spTree>
-  </p:cSld>
-  <p:clrMapOvr>
-    <a:masterClrMapping/>
-  </p:clrMapOvr>
-</p:sld>
-</file>
-
-<file path=ppt/slides/slide8.xml><?xml version="1.0" encoding="utf-8"?>
-<p:sld xmlns:a="http://schemas.openxmlformats.org/drawingml/2006/main" xmlns:p="http://schemas.openxmlformats.org/presentationml/2006/main" xmlns:r="http://schemas.openxmlformats.org/officeDocument/2006/relationships">
-  <p:cSld>
-    <p:spTree>
-      <p:nvGrpSpPr>
-        <p:cNvPr id="1" name=""/>
-        <p:cNvGrpSpPr/>
-        <p:nvPr/>
-      </p:nvGrpSpPr>
-      <p:grpSpPr/>
-      <p:sp>
-        <p:nvSpPr>
-          <p:cNvPr id="2" name="Title 1"/>
-          <p:cNvSpPr>
-            <a:spLocks noGrp="1"/>
-          </p:cNvSpPr>
-          <p:nvPr>
-            <p:ph type="title"/>
-          </p:nvPr>
-        </p:nvSpPr>
-        <p:spPr/>
-        <p:txBody>
-          <a:bodyPr/>
-          <a:lstStyle/>
-          <a:p>
-            <a:r>
-              <a:rPr sz="3200" b="1">
-                <a:solidFill>
-                  <a:srgbClr val="CC0066"/>
-                </a:solidFill>
-                <a:latin typeface="Calibri"/>
-              </a:rPr>
-              <a:t>Session Agenda</a:t>
-            </a:r>
-          </a:p>
-        </p:txBody>
-      </p:sp>
-      <p:sp>
-        <p:nvSpPr>
-          <p:cNvPr id="3" name="TextBox 2"/>
-          <p:cNvSpPr txBox="1"/>
-          <p:nvPr/>
-        </p:nvSpPr>
-        <p:spPr>
-          <a:xfrm>
-            <a:off x="822960" y="1463040"/>
-            <a:ext cx="10515600" cy="5029200"/>
-          </a:xfrm>
-          <a:prstGeom prst="rect">
-            <a:avLst/>
-          </a:prstGeom>
-          <a:noFill/>
-        </p:spPr>
-        <p:txBody>
-          <a:bodyPr wrap="square" lIns="45720" rIns="45720">
-            <a:spAutoFit/>
-          </a:bodyPr>
-          <a:lstStyle/>
-          <a:p>
-            <a:pPr>
-              <a:spcAft>
-                <a:spcPts val="600"/>
-              </a:spcAft>
-            </a:pPr>
-            <a:r>
-              <a:rPr sz="2000" b="0" i="0">
-                <a:solidFill>
-                  <a:srgbClr val="333333"/>
-                </a:solidFill>
-                <a:latin typeface="Calibri"/>
-              </a:rPr>
-              <a:t>1.  Build an app with the SDK</a:t>
-            </a:r>
-          </a:p>
-          <a:p>
-            <a:pPr>
-              <a:spcAft>
-                <a:spcPts val="600"/>
-              </a:spcAft>
-            </a:pPr>
-            <a:r>
-              <a:rPr sz="2000" b="0" i="0">
-                <a:solidFill>
-                  <a:srgbClr val="333333"/>
-                </a:solidFill>
-                <a:latin typeface="Calibri"/>
-              </a:rPr>
-              <a:t>2.  Deploy to target</a:t>
-            </a:r>
-          </a:p>
-          <a:p>
-            <a:pPr>
-              <a:spcAft>
-                <a:spcPts val="600"/>
-              </a:spcAft>
-            </a:pPr>
-            <a:r>
-              <a:rPr sz="2000" b="0" i="0">
-                <a:solidFill>
-                  <a:srgbClr val="333333"/>
-                </a:solidFill>
-                <a:latin typeface="Calibri"/>
-              </a:rPr>
-              <a:t>3.  Validate runtime dependencies</a:t>
-            </a:r>
-          </a:p>
-          <a:p>
-            <a:pPr>
-              <a:spcAft>
-                <a:spcPts val="600"/>
-              </a:spcAft>
-            </a:pPr>
-            <a:r>
-              <a:rPr sz="2000" b="0" i="0">
-                <a:solidFill>
-                  <a:srgbClr val="333333"/>
-                </a:solidFill>
-                <a:latin typeface="Calibri"/>
-              </a:rPr>
-              <a:t>4.  Remote debugging with gdb + gdbserver</a:t>
-            </a:r>
-          </a:p>
-          <a:p>
-            <a:pPr>
-              <a:spcAft>
-                <a:spcPts val="600"/>
-              </a:spcAft>
-            </a:pPr>
-            <a:r>
-              <a:rPr sz="2000" b="0" i="0">
-                <a:solidFill>
-                  <a:srgbClr val="333333"/>
-                </a:solidFill>
-                <a:latin typeface="Calibri"/>
-              </a:rPr>
-              <a:t>5.  strace — diagnosing live behavior</a:t>
-            </a:r>
-          </a:p>
-          <a:p>
-            <a:pPr>
-              <a:spcAft>
-                <a:spcPts val="600"/>
-              </a:spcAft>
-            </a:pPr>
-            <a:r>
-              <a:rPr sz="2000" b="0" i="0">
-                <a:solidFill>
-                  <a:srgbClr val="333333"/>
-                </a:solidFill>
-                <a:latin typeface="Calibri"/>
-              </a:rPr>
-              <a:t>6.  Core dumps from crashes</a:t>
-            </a:r>
-          </a:p>
-          <a:p>
-            <a:pPr>
-              <a:spcAft>
-                <a:spcPts val="600"/>
-              </a:spcAft>
-            </a:pPr>
-            <a:r>
-              <a:rPr sz="2000" b="0" i="0">
-                <a:solidFill>
-                  <a:srgbClr val="333333"/>
-                </a:solidFill>
-                <a:latin typeface="Calibri"/>
-              </a:rPr>
-              <a:t>7.  Hands-on lab</a:t>
-            </a:r>
-          </a:p>
-        </p:txBody>
-      </p:sp>
-    </p:spTree>
-  </p:cSld>
-  <p:clrMapOvr>
-    <a:masterClrMapping/>
-  </p:clrMapOvr>
-</p:sld>
-</file>
-
-<file path=ppt/slides/slide9.xml><?xml version="1.0" encoding="utf-8"?>
-<p:sld xmlns:a="http://schemas.openxmlformats.org/drawingml/2006/main" xmlns:p="http://schemas.openxmlformats.org/presentationml/2006/main" xmlns:r="http://schemas.openxmlformats.org/officeDocument/2006/relationships">
-  <p:cSld>
-    <p:spTree>
-      <p:nvGrpSpPr>
-        <p:cNvPr id="1" name=""/>
-        <p:cNvGrpSpPr/>
-        <p:nvPr/>
-      </p:nvGrpSpPr>
-      <p:grpSpPr/>
-      <p:sp>
-        <p:nvSpPr>
-          <p:cNvPr id="2" name="Title 1"/>
-          <p:cNvSpPr>
-            <a:spLocks noGrp="1"/>
-          </p:cNvSpPr>
-          <p:nvPr>
-            <p:ph type="title"/>
-          </p:nvPr>
-        </p:nvSpPr>
-        <p:spPr/>
-        <p:txBody>
-          <a:bodyPr/>
-          <a:lstStyle/>
-          <a:p>
-            <a:r>
-              <a:rPr sz="3200" b="1">
-                <a:solidFill>
-                  <a:srgbClr val="CC0066"/>
-                </a:solidFill>
-                <a:latin typeface="Calibri"/>
-              </a:rPr>
-              <a:t>Build with the SDK</a:t>
-            </a:r>
-          </a:p>
-        </p:txBody>
-      </p:sp>
-      <p:sp>
-        <p:nvSpPr>
-          <p:cNvPr id="3" name="TextBox 2"/>
-          <p:cNvSpPr txBox="1"/>
-          <p:nvPr/>
-        </p:nvSpPr>
-        <p:spPr>
-          <a:xfrm>
-            <a:off x="822960" y="1417320"/>
-            <a:ext cx="10515600" cy="365760"/>
-          </a:xfrm>
-          <a:prstGeom prst="rect">
-            <a:avLst/>
-          </a:prstGeom>
-          <a:noFill/>
-        </p:spPr>
-        <p:txBody>
-          <a:bodyPr wrap="square" anchor="t" lIns="45720" rIns="45720">
-            <a:spAutoFit/>
-          </a:bodyPr>
-          <a:lstStyle/>
-          <a:p>
-            <a:pPr algn="l"/>
-            <a:r>
-              <a:rPr sz="1500" b="0" i="1">
-                <a:solidFill>
-                  <a:srgbClr val="666666"/>
-                </a:solidFill>
-                <a:latin typeface="Calibri"/>
-              </a:rPr>
-              <a:t>Cross-compile against the target's sysroot.</a:t>
-            </a:r>
-          </a:p>
-        </p:txBody>
-      </p:sp>
-      <p:sp>
-        <p:nvSpPr>
-          <p:cNvPr id="4" name="Rounded Rectangle 3"/>
-          <p:cNvSpPr/>
-          <p:nvPr/>
-        </p:nvSpPr>
-        <p:spPr>
-          <a:xfrm>
-            <a:off x="822960" y="1783080"/>
-            <a:ext cx="10515600" cy="4572000"/>
-          </a:xfrm>
-          <a:prstGeom prst="roundRect">
-            <a:avLst/>
-          </a:prstGeom>
-          <a:solidFill>
-            <a:srgbClr val="F5F5F5"/>
-          </a:solidFill>
-          <a:ln w="6350">
-            <a:solidFill>
-              <a:srgbClr val="D0D0D0"/>
-            </a:solidFill>
-          </a:ln>
-          <a:effectLst/>
-        </p:spPr>
-        <p:style>
-          <a:lnRef idx="1">
-            <a:schemeClr val="accent1"/>
-          </a:lnRef>
-          <a:fillRef idx="3">
-            <a:schemeClr val="accent1"/>
-          </a:fillRef>
-          <a:effectRef idx="2">
-            <a:schemeClr val="accent1"/>
-          </a:effectRef>
-          <a:fontRef idx="minor">
-            <a:schemeClr val="lt1"/>
-          </a:fontRef>
-        </p:style>
-        <p:txBody>
-          <a:bodyPr rtlCol="0" anchor="ctr"/>
-          <a:lstStyle/>
-          <a:p>
-            <a:pPr algn="ctr"/>
-          </a:p>
-        </p:txBody>
-      </p:sp>
-      <p:sp>
-        <p:nvSpPr>
-          <p:cNvPr id="5" name="Rectangle 4"/>
-          <p:cNvSpPr/>
-          <p:nvPr/>
-        </p:nvSpPr>
-        <p:spPr>
-          <a:xfrm>
-            <a:off x="822960" y="1783080"/>
-            <a:ext cx="73152" cy="4572000"/>
-          </a:xfrm>
-          <a:prstGeom prst="rect">
-            <a:avLst/>
-          </a:prstGeom>
-          <a:solidFill>
-            <a:srgbClr val="CC0066"/>
-          </a:solidFill>
-          <a:ln>
-            <a:noFill/>
-          </a:ln>
-          <a:effectLst/>
-        </p:spPr>
-        <p:style>
-          <a:lnRef idx="1">
-            <a:schemeClr val="accent1"/>
-          </a:lnRef>
-          <a:fillRef idx="3">
-            <a:schemeClr val="accent1"/>
-          </a:fillRef>
-          <a:effectRef idx="2">
-            <a:schemeClr val="accent1"/>
-          </a:effectRef>
-          <a:fontRef idx="minor">
-            <a:schemeClr val="lt1"/>
-          </a:fontRef>
-        </p:style>
-        <p:txBody>
-          <a:bodyPr rtlCol="0" anchor="ctr"/>
-          <a:lstStyle/>
-          <a:p>
-            <a:pPr algn="ctr"/>
-          </a:p>
-        </p:txBody>
-      </p:sp>
-      <p:sp>
-        <p:nvSpPr>
-          <p:cNvPr id="6" name="TextBox 5"/>
-          <p:cNvSpPr txBox="1"/>
-          <p:nvPr/>
-        </p:nvSpPr>
-        <p:spPr>
-          <a:xfrm>
-            <a:off x="1005840" y="1874519"/>
-            <a:ext cx="10241280" cy="4389120"/>
-          </a:xfrm>
-          <a:prstGeom prst="rect">
-            <a:avLst/>
-          </a:prstGeom>
-          <a:noFill/>
-        </p:spPr>
-        <p:txBody>
-          <a:bodyPr wrap="square" lIns="45720" rIns="45720">
-            <a:spAutoFit/>
-          </a:bodyPr>
-          <a:lstStyle/>
-          <a:p>
-            <a:pPr>
-              <a:spcAft>
-                <a:spcPts val="0"/>
-              </a:spcAft>
-            </a:pPr>
-            <a:r>
-              <a:rPr sz="1000" i="1">
-                <a:solidFill>
-                  <a:srgbClr val="808080"/>
-                </a:solidFill>
-                <a:latin typeface="Consolas"/>
-              </a:rPr>
-              <a:t># Source the SDK environment (set up Day 3)</a:t>
-            </a:r>
-          </a:p>
-          <a:p>
-            <a:pPr>
-              <a:spcAft>
-                <a:spcPts val="0"/>
-              </a:spcAft>
-            </a:pPr>
-            <a:r>
-              <a:rPr sz="1000">
-                <a:solidFill>
-                  <a:srgbClr val="2D2D2D"/>
-                </a:solidFill>
-                <a:latin typeface="Consolas"/>
-              </a:rPr>
-              <a:t>source /opt/poky/5.0/environment-setup-corei7-64-poky-linux</a:t>
-            </a:r>
-          </a:p>
-          <a:p>
-            <a:pPr>
-              <a:spcAft>
-                <a:spcPts val="0"/>
-              </a:spcAft>
-            </a:pPr>
-            <a:r>
-              <a:rPr sz="1000">
-                <a:solidFill>
-                  <a:srgbClr val="2D2D2D"/>
-                </a:solidFill>
-                <a:latin typeface="Consolas"/>
-              </a:rPr>
-              <a:t> </a:t>
-            </a:r>
-          </a:p>
-          <a:p>
-            <a:pPr>
-              <a:spcAft>
-                <a:spcPts val="0"/>
-              </a:spcAft>
-            </a:pPr>
-            <a:r>
-              <a:rPr sz="1000" i="1">
-                <a:solidFill>
-                  <a:srgbClr val="808080"/>
-                </a:solidFill>
-                <a:latin typeface="Consolas"/>
-              </a:rPr>
-              <a:t># Now CC, CXX, AR, LD, sysroot are all set</a:t>
-            </a:r>
-          </a:p>
-          <a:p>
-            <a:pPr>
-              <a:spcAft>
-                <a:spcPts val="0"/>
-              </a:spcAft>
-            </a:pPr>
-            <a:r>
-              <a:rPr sz="1000">
-                <a:solidFill>
-                  <a:srgbClr val="2D2D2D"/>
-                </a:solidFill>
-                <a:latin typeface="Consolas"/>
-              </a:rPr>
-              <a:t>echo $CC</a:t>
-            </a:r>
-          </a:p>
-          <a:p>
-            <a:pPr>
-              <a:spcAft>
-                <a:spcPts val="0"/>
-              </a:spcAft>
-            </a:pPr>
-            <a:r>
-              <a:rPr sz="1000" i="1">
-                <a:solidFill>
-                  <a:srgbClr val="808080"/>
-                </a:solidFill>
-                <a:latin typeface="Consolas"/>
-              </a:rPr>
-              <a:t># x86_64-poky-linux-gcc  --sysroot=...</a:t>
-            </a:r>
-          </a:p>
-          <a:p>
-            <a:pPr>
-              <a:spcAft>
-                <a:spcPts val="0"/>
-              </a:spcAft>
-            </a:pPr>
-            <a:r>
-              <a:rPr sz="1000">
-                <a:solidFill>
-                  <a:srgbClr val="2D2D2D"/>
-                </a:solidFill>
-                <a:latin typeface="Consolas"/>
-              </a:rPr>
-              <a:t> </a:t>
-            </a:r>
-          </a:p>
-          <a:p>
-            <a:pPr>
-              <a:spcAft>
-                <a:spcPts val="0"/>
-              </a:spcAft>
-            </a:pPr>
-            <a:r>
-              <a:rPr sz="1000" i="1">
-                <a:solidFill>
-                  <a:srgbClr val="808080"/>
-                </a:solidFill>
-                <a:latin typeface="Consolas"/>
-              </a:rPr>
-              <a:t># Build a simple C program</a:t>
-            </a:r>
-          </a:p>
-          <a:p>
-            <a:pPr>
-              <a:spcAft>
-                <a:spcPts val="0"/>
-              </a:spcAft>
-            </a:pPr>
-            <a:r>
-              <a:rPr sz="1000">
-                <a:solidFill>
-                  <a:srgbClr val="2D2D2D"/>
-                </a:solidFill>
-                <a:latin typeface="Consolas"/>
-              </a:rPr>
-              <a:t>cat &gt; myapp.c &lt;&lt;'EOF'</a:t>
-            </a:r>
-          </a:p>
-          <a:p>
-            <a:pPr>
-              <a:spcAft>
-                <a:spcPts val="0"/>
-              </a:spcAft>
-            </a:pPr>
-            <a:r>
-              <a:rPr sz="1000" i="1">
-                <a:solidFill>
-                  <a:srgbClr val="808080"/>
-                </a:solidFill>
-                <a:latin typeface="Consolas"/>
-              </a:rPr>
-              <a:t>#include &lt;stdio.h&gt;</a:t>
-            </a:r>
-          </a:p>
-          <a:p>
-            <a:pPr>
-              <a:spcAft>
-                <a:spcPts val="0"/>
-              </a:spcAft>
-            </a:pPr>
-            <a:r>
-              <a:rPr sz="1000" i="1">
-                <a:solidFill>
-                  <a:srgbClr val="808080"/>
-                </a:solidFill>
-                <a:latin typeface="Consolas"/>
-              </a:rPr>
-              <a:t>#include &lt;openssl/sha.h&gt;</a:t>
-            </a:r>
-          </a:p>
-          <a:p>
-            <a:pPr>
-              <a:spcAft>
-                <a:spcPts val="0"/>
-              </a:spcAft>
-            </a:pPr>
-            <a:r>
-              <a:rPr sz="1000">
-                <a:solidFill>
-                  <a:srgbClr val="2D2D2D"/>
-                </a:solidFill>
-                <a:latin typeface="Consolas"/>
-              </a:rPr>
-              <a:t>int main() {</a:t>
-            </a:r>
-          </a:p>
-          <a:p>
-            <a:pPr>
-              <a:spcAft>
-                <a:spcPts val="0"/>
-              </a:spcAft>
-            </a:pPr>
-            <a:r>
-              <a:rPr sz="1000">
-                <a:solidFill>
-                  <a:srgbClr val="2D2D2D"/>
-                </a:solidFill>
-                <a:latin typeface="Consolas"/>
-              </a:rPr>
-              <a:t>    unsigned char hash[SHA256_DIGEST_LENGTH];</a:t>
-            </a:r>
-          </a:p>
-          <a:p>
-            <a:pPr>
-              <a:spcAft>
-                <a:spcPts val="0"/>
-              </a:spcAft>
-            </a:pPr>
-            <a:r>
-              <a:rPr sz="1000">
-                <a:solidFill>
-                  <a:srgbClr val="2D2D2D"/>
-                </a:solidFill>
-                <a:latin typeface="Consolas"/>
-              </a:rPr>
-              <a:t>    SHA256((unsigned char*)"hello", 5, hash);</a:t>
-            </a:r>
-          </a:p>
-          <a:p>
-            <a:pPr>
-              <a:spcAft>
-                <a:spcPts val="0"/>
-              </a:spcAft>
-            </a:pPr>
-            <a:r>
-              <a:rPr sz="1000">
-                <a:solidFill>
-                  <a:srgbClr val="2D2D2D"/>
-                </a:solidFill>
-                <a:latin typeface="Consolas"/>
-              </a:rPr>
-              <a:t>    printf("Hashed!\n");</a:t>
-            </a:r>
-          </a:p>
-          <a:p>
-            <a:pPr>
-              <a:spcAft>
-                <a:spcPts val="0"/>
-              </a:spcAft>
-            </a:pPr>
-            <a:r>
-              <a:rPr sz="1000">
-                <a:solidFill>
-                  <a:srgbClr val="2D2D2D"/>
-                </a:solidFill>
-                <a:latin typeface="Consolas"/>
-              </a:rPr>
-              <a:t>    return 0;</a:t>
-            </a:r>
-          </a:p>
-          <a:p>
-            <a:pPr>
-              <a:spcAft>
-                <a:spcPts val="0"/>
-              </a:spcAft>
-            </a:pPr>
-            <a:r>
-              <a:rPr sz="1000">
-                <a:solidFill>
-                  <a:srgbClr val="2D2D2D"/>
-                </a:solidFill>
-                <a:latin typeface="Consolas"/>
-              </a:rPr>
-              <a:t>}</a:t>
-            </a:r>
-          </a:p>
-          <a:p>
-            <a:pPr>
-              <a:spcAft>
-                <a:spcPts val="0"/>
-              </a:spcAft>
-            </a:pPr>
-            <a:r>
-              <a:rPr sz="1000">
-                <a:solidFill>
-                  <a:srgbClr val="2D2D2D"/>
-                </a:solidFill>
-                <a:latin typeface="Consolas"/>
-              </a:rPr>
-              <a:t>EOF</a:t>
-            </a:r>
-          </a:p>
-          <a:p>
-            <a:pPr>
-              <a:spcAft>
-                <a:spcPts val="0"/>
-              </a:spcAft>
-            </a:pPr>
-            <a:r>
-              <a:rPr sz="1000">
-                <a:solidFill>
-                  <a:srgbClr val="2D2D2D"/>
-                </a:solidFill>
-                <a:latin typeface="Consolas"/>
-              </a:rPr>
-              <a:t> </a:t>
-            </a:r>
-          </a:p>
-          <a:p>
-            <a:pPr>
-              <a:spcAft>
-                <a:spcPts val="0"/>
-              </a:spcAft>
-            </a:pPr>
-            <a:r>
-              <a:rPr sz="1000">
-                <a:solidFill>
-                  <a:srgbClr val="2D2D2D"/>
-                </a:solidFill>
-                <a:latin typeface="Consolas"/>
-              </a:rPr>
-              <a:t>$CC myapp.c -o myapp -lcrypto</a:t>
-            </a:r>
-          </a:p>
-          <a:p>
-            <a:pPr>
-              <a:spcAft>
-                <a:spcPts val="0"/>
-              </a:spcAft>
-            </a:pPr>
-            <a:r>
-              <a:rPr sz="1000">
-                <a:solidFill>
-                  <a:srgbClr val="2D2D2D"/>
-                </a:solidFill>
-                <a:latin typeface="Consolas"/>
-              </a:rPr>
-              <a:t> </a:t>
-            </a:r>
-          </a:p>
-          <a:p>
-            <a:pPr>
-              <a:spcAft>
-                <a:spcPts val="0"/>
-              </a:spcAft>
-            </a:pPr>
-            <a:r>
-              <a:rPr sz="1000">
-                <a:solidFill>
-                  <a:srgbClr val="2D2D2D"/>
-                </a:solidFill>
-                <a:latin typeface="Consolas"/>
-              </a:rPr>
-              <a:t>file myapp</a:t>
-            </a:r>
-          </a:p>
-          <a:p>
-            <a:pPr>
-              <a:spcAft>
-                <a:spcPts val="0"/>
-              </a:spcAft>
-            </a:pPr>
-            <a:r>
-              <a:rPr sz="1000" i="1">
-                <a:solidFill>
-                  <a:srgbClr val="808080"/>
-                </a:solidFill>
-                <a:latin typeface="Consolas"/>
-              </a:rPr>
-              <a:t># myapp: ELF 64-bit LSB ... for target arch ...</a:t>
             </a:r>
           </a:p>
         </p:txBody>
